--- a/make_presentation/templates/templates/creative/_12.pptx
+++ b/make_presentation/templates/templates/creative/_12.pptx
@@ -71,146 +71,17 @@
             <a:noAutofit/>
           </a:bodyPr>
           <a:p>
-            <a:r>
-              <a:rPr b="0" lang="en-US" sz="1800" spc="-1" strike="noStrike">
-                <a:solidFill>
-                  <a:srgbClr val="000000"/>
-                </a:solidFill>
-                <a:latin typeface="Calibri"/>
-              </a:rPr>
-              <a:t>Cl</a:t>
-            </a:r>
-            <a:r>
-              <a:rPr b="0" lang="en-US" sz="1800" spc="-1" strike="noStrike">
-                <a:solidFill>
-                  <a:srgbClr val="000000"/>
-                </a:solidFill>
-                <a:latin typeface="Calibri"/>
-              </a:rPr>
-              <a:t>ic</a:t>
-            </a:r>
-            <a:r>
-              <a:rPr b="0" lang="en-US" sz="1800" spc="-1" strike="noStrike">
-                <a:solidFill>
-                  <a:srgbClr val="000000"/>
-                </a:solidFill>
-                <a:latin typeface="Calibri"/>
-              </a:rPr>
-              <a:t>k </a:t>
-            </a:r>
-            <a:r>
-              <a:rPr b="0" lang="en-US" sz="1800" spc="-1" strike="noStrike">
-                <a:solidFill>
-                  <a:srgbClr val="000000"/>
-                </a:solidFill>
-                <a:latin typeface="Calibri"/>
-              </a:rPr>
-              <a:t>t</a:t>
-            </a:r>
-            <a:r>
-              <a:rPr b="0" lang="en-US" sz="1800" spc="-1" strike="noStrike">
-                <a:solidFill>
-                  <a:srgbClr val="000000"/>
-                </a:solidFill>
-                <a:latin typeface="Calibri"/>
-              </a:rPr>
-              <a:t>o </a:t>
-            </a:r>
-            <a:r>
-              <a:rPr b="0" lang="en-US" sz="1800" spc="-1" strike="noStrike">
-                <a:solidFill>
-                  <a:srgbClr val="000000"/>
-                </a:solidFill>
-                <a:latin typeface="Calibri"/>
-              </a:rPr>
-              <a:t>m</a:t>
-            </a:r>
-            <a:r>
-              <a:rPr b="0" lang="en-US" sz="1800" spc="-1" strike="noStrike">
-                <a:solidFill>
-                  <a:srgbClr val="000000"/>
-                </a:solidFill>
-                <a:latin typeface="Calibri"/>
-              </a:rPr>
-              <a:t>o</a:t>
-            </a:r>
-            <a:r>
-              <a:rPr b="0" lang="en-US" sz="1800" spc="-1" strike="noStrike">
-                <a:solidFill>
-                  <a:srgbClr val="000000"/>
-                </a:solidFill>
-                <a:latin typeface="Calibri"/>
-              </a:rPr>
-              <a:t>v</a:t>
-            </a:r>
-            <a:r>
-              <a:rPr b="0" lang="en-US" sz="1800" spc="-1" strike="noStrike">
-                <a:solidFill>
-                  <a:srgbClr val="000000"/>
-                </a:solidFill>
-                <a:latin typeface="Calibri"/>
-              </a:rPr>
-              <a:t>e </a:t>
-            </a:r>
-            <a:r>
-              <a:rPr b="0" lang="en-US" sz="1800" spc="-1" strike="noStrike">
-                <a:solidFill>
-                  <a:srgbClr val="000000"/>
-                </a:solidFill>
-                <a:latin typeface="Calibri"/>
-              </a:rPr>
-              <a:t>t</a:t>
-            </a:r>
-            <a:r>
-              <a:rPr b="0" lang="en-US" sz="1800" spc="-1" strike="noStrike">
-                <a:solidFill>
-                  <a:srgbClr val="000000"/>
-                </a:solidFill>
-                <a:latin typeface="Calibri"/>
-              </a:rPr>
-              <a:t>h</a:t>
-            </a:r>
-            <a:r>
-              <a:rPr b="0" lang="en-US" sz="1800" spc="-1" strike="noStrike">
-                <a:solidFill>
-                  <a:srgbClr val="000000"/>
-                </a:solidFill>
-                <a:latin typeface="Calibri"/>
-              </a:rPr>
-              <a:t>e </a:t>
-            </a:r>
-            <a:r>
-              <a:rPr b="0" lang="en-US" sz="1800" spc="-1" strike="noStrike">
-                <a:solidFill>
-                  <a:srgbClr val="000000"/>
-                </a:solidFill>
-                <a:latin typeface="Calibri"/>
-              </a:rPr>
-              <a:t>sl</a:t>
-            </a:r>
-            <a:r>
-              <a:rPr b="0" lang="en-US" sz="1800" spc="-1" strike="noStrike">
-                <a:solidFill>
-                  <a:srgbClr val="000000"/>
-                </a:solidFill>
-                <a:latin typeface="Calibri"/>
-              </a:rPr>
-              <a:t>id</a:t>
-            </a:r>
-            <a:r>
-              <a:rPr b="0" lang="en-US" sz="1800" spc="-1" strike="noStrike">
-                <a:solidFill>
-                  <a:srgbClr val="000000"/>
-                </a:solidFill>
-                <a:latin typeface="Calibri"/>
-              </a:rPr>
-              <a:t>e</a:t>
-            </a:r>
-            <a:endParaRPr b="0" lang="en-US" sz="1800" spc="-1" strike="noStrike">
-              <a:solidFill>
-                <a:srgbClr val="000000"/>
-              </a:solidFill>
-              <a:latin typeface="Calibri"/>
+            <a:pPr algn="ctr">
+              <a:buNone/>
+            </a:pPr>
+            <a:r>
+              <a:rPr b="0" lang="en-US" sz="4400" spc="-1" strike="noStrike">
+                <a:latin typeface="Arial"/>
+              </a:rPr>
+              <a:t>Click to move the slide</a:t>
+            </a:r>
+            <a:endParaRPr b="0" lang="en-US" sz="4400" spc="-1" strike="noStrike">
+              <a:latin typeface="Arial"/>
             </a:endParaRPr>
           </a:p>
         </p:txBody>
@@ -432,7 +303,7 @@
             <a:pPr algn="r">
               <a:buNone/>
             </a:pPr>
-            <a:fld id="{4F5AD52E-88AE-4F60-89E5-F4E1DFCE467F}" type="slidenum">
+            <a:fld id="{27810056-C819-4266-B179-A828969C062A}" type="slidenum">
               <a:rPr b="0" lang="en-US" sz="1400" spc="-1" strike="noStrike">
                 <a:latin typeface="Times New Roman"/>
               </a:rPr>
@@ -480,7 +351,7 @@
         <p:spPr>
           <a:xfrm>
             <a:off x="685800" y="1143000"/>
-            <a:ext cx="5486040" cy="3085920"/>
+            <a:ext cx="5485680" cy="3085560"/>
           </a:xfrm>
           <a:prstGeom prst="rect">
             <a:avLst/>
@@ -503,18 +374,18 @@
         <p:spPr>
           <a:xfrm>
             <a:off x="685800" y="4400640"/>
-            <a:ext cx="5486040" cy="3600000"/>
-          </a:xfrm>
-          <a:prstGeom prst="rect">
-            <a:avLst/>
-          </a:prstGeom>
-          <a:noFill/>
-          <a:ln w="0">
-            <a:noFill/>
-          </a:ln>
-        </p:spPr>
-        <p:txBody>
-          <a:bodyPr anchor="t">
+            <a:ext cx="5485680" cy="3599640"/>
+          </a:xfrm>
+          <a:prstGeom prst="rect">
+            <a:avLst/>
+          </a:prstGeom>
+          <a:noFill/>
+          <a:ln w="0">
+            <a:noFill/>
+          </a:ln>
+        </p:spPr>
+        <p:txBody>
+          <a:bodyPr lIns="0" rIns="0" tIns="0" bIns="0" anchor="t">
             <a:noAutofit/>
           </a:bodyPr>
           <a:p>
@@ -537,18 +408,18 @@
         <p:spPr>
           <a:xfrm>
             <a:off x="3884760" y="8685360"/>
-            <a:ext cx="2971440" cy="458280"/>
-          </a:xfrm>
-          <a:prstGeom prst="rect">
-            <a:avLst/>
-          </a:prstGeom>
-          <a:noFill/>
-          <a:ln w="0">
-            <a:noFill/>
-          </a:ln>
-        </p:spPr>
-        <p:txBody>
-          <a:bodyPr anchor="b">
+            <a:ext cx="2971080" cy="457920"/>
+          </a:xfrm>
+          <a:prstGeom prst="rect">
+            <a:avLst/>
+          </a:prstGeom>
+          <a:noFill/>
+          <a:ln w="0">
+            <a:noFill/>
+          </a:ln>
+        </p:spPr>
+        <p:txBody>
+          <a:bodyPr lIns="0" rIns="0" tIns="0" bIns="0" anchor="b">
             <a:noAutofit/>
           </a:bodyPr>
           <a:lstStyle>
@@ -569,7 +440,7 @@
               </a:lnSpc>
               <a:buNone/>
             </a:pPr>
-            <a:fld id="{5F7092BC-4942-4D9B-90F5-01C5E61933EE}" type="slidenum">
+            <a:fld id="{528080B7-B40A-4A42-AD0D-483B6E22DCEB}" type="slidenum">
               <a:rPr b="0" lang="ru-RU" sz="1200" spc="-1" strike="noStrike">
                 <a:latin typeface="Times New Roman"/>
               </a:rPr>
@@ -616,7 +487,7 @@
         <p:spPr>
           <a:xfrm>
             <a:off x="685800" y="1143000"/>
-            <a:ext cx="5486040" cy="3085920"/>
+            <a:ext cx="5485680" cy="3085560"/>
           </a:xfrm>
           <a:prstGeom prst="rect">
             <a:avLst/>
@@ -639,18 +510,18 @@
         <p:spPr>
           <a:xfrm>
             <a:off x="685800" y="4400640"/>
-            <a:ext cx="5486040" cy="3600000"/>
-          </a:xfrm>
-          <a:prstGeom prst="rect">
-            <a:avLst/>
-          </a:prstGeom>
-          <a:noFill/>
-          <a:ln w="0">
-            <a:noFill/>
-          </a:ln>
-        </p:spPr>
-        <p:txBody>
-          <a:bodyPr anchor="t">
+            <a:ext cx="5485680" cy="3599640"/>
+          </a:xfrm>
+          <a:prstGeom prst="rect">
+            <a:avLst/>
+          </a:prstGeom>
+          <a:noFill/>
+          <a:ln w="0">
+            <a:noFill/>
+          </a:ln>
+        </p:spPr>
+        <p:txBody>
+          <a:bodyPr lIns="0" rIns="0" tIns="0" bIns="0" anchor="t">
             <a:noAutofit/>
           </a:bodyPr>
           <a:p>
@@ -673,18 +544,18 @@
         <p:spPr>
           <a:xfrm>
             <a:off x="3884760" y="8685360"/>
-            <a:ext cx="2971440" cy="458280"/>
-          </a:xfrm>
-          <a:prstGeom prst="rect">
-            <a:avLst/>
-          </a:prstGeom>
-          <a:noFill/>
-          <a:ln w="0">
-            <a:noFill/>
-          </a:ln>
-        </p:spPr>
-        <p:txBody>
-          <a:bodyPr anchor="b">
+            <a:ext cx="2971080" cy="457920"/>
+          </a:xfrm>
+          <a:prstGeom prst="rect">
+            <a:avLst/>
+          </a:prstGeom>
+          <a:noFill/>
+          <a:ln w="0">
+            <a:noFill/>
+          </a:ln>
+        </p:spPr>
+        <p:txBody>
+          <a:bodyPr lIns="0" rIns="0" tIns="0" bIns="0" anchor="b">
             <a:noAutofit/>
           </a:bodyPr>
           <a:lstStyle>
@@ -705,7 +576,7 @@
               </a:lnSpc>
               <a:buNone/>
             </a:pPr>
-            <a:fld id="{0635CC55-4B2A-4EA1-8B54-F0583D31642C}" type="slidenum">
+            <a:fld id="{CD6F046A-10B4-41CE-9ADB-99118CB2BE19}" type="slidenum">
               <a:rPr b="0" lang="ru-RU" sz="1200" spc="-1" strike="noStrike">
                 <a:latin typeface="Times New Roman"/>
               </a:rPr>
@@ -752,7 +623,7 @@
         <p:spPr>
           <a:xfrm>
             <a:off x="685800" y="1143000"/>
-            <a:ext cx="5486040" cy="3085920"/>
+            <a:ext cx="5485680" cy="3085560"/>
           </a:xfrm>
           <a:prstGeom prst="rect">
             <a:avLst/>
@@ -775,18 +646,18 @@
         <p:spPr>
           <a:xfrm>
             <a:off x="685800" y="4400640"/>
-            <a:ext cx="5486040" cy="3600000"/>
-          </a:xfrm>
-          <a:prstGeom prst="rect">
-            <a:avLst/>
-          </a:prstGeom>
-          <a:noFill/>
-          <a:ln w="0">
-            <a:noFill/>
-          </a:ln>
-        </p:spPr>
-        <p:txBody>
-          <a:bodyPr anchor="t">
+            <a:ext cx="5485680" cy="3599640"/>
+          </a:xfrm>
+          <a:prstGeom prst="rect">
+            <a:avLst/>
+          </a:prstGeom>
+          <a:noFill/>
+          <a:ln w="0">
+            <a:noFill/>
+          </a:ln>
+        </p:spPr>
+        <p:txBody>
+          <a:bodyPr lIns="0" rIns="0" tIns="0" bIns="0" anchor="t">
             <a:noAutofit/>
           </a:bodyPr>
           <a:p>
@@ -809,18 +680,18 @@
         <p:spPr>
           <a:xfrm>
             <a:off x="3884760" y="8685360"/>
-            <a:ext cx="2971440" cy="458280"/>
-          </a:xfrm>
-          <a:prstGeom prst="rect">
-            <a:avLst/>
-          </a:prstGeom>
-          <a:noFill/>
-          <a:ln w="0">
-            <a:noFill/>
-          </a:ln>
-        </p:spPr>
-        <p:txBody>
-          <a:bodyPr anchor="b">
+            <a:ext cx="2971080" cy="457920"/>
+          </a:xfrm>
+          <a:prstGeom prst="rect">
+            <a:avLst/>
+          </a:prstGeom>
+          <a:noFill/>
+          <a:ln w="0">
+            <a:noFill/>
+          </a:ln>
+        </p:spPr>
+        <p:txBody>
+          <a:bodyPr lIns="0" rIns="0" tIns="0" bIns="0" anchor="b">
             <a:noAutofit/>
           </a:bodyPr>
           <a:lstStyle>
@@ -841,7 +712,7 @@
               </a:lnSpc>
               <a:buNone/>
             </a:pPr>
-            <a:fld id="{C049B1DC-8934-4CA6-BD9E-89AB57F31252}" type="slidenum">
+            <a:fld id="{A654DABA-38D8-440D-A49D-45F95456951D}" type="slidenum">
               <a:rPr b="0" lang="ru-RU" sz="1200" spc="-1" strike="noStrike">
                 <a:latin typeface="Times New Roman"/>
               </a:rPr>
@@ -888,7 +759,7 @@
         <p:spPr>
           <a:xfrm>
             <a:off x="685800" y="1143000"/>
-            <a:ext cx="5486040" cy="3085920"/>
+            <a:ext cx="5485680" cy="3085560"/>
           </a:xfrm>
           <a:prstGeom prst="rect">
             <a:avLst/>
@@ -911,18 +782,18 @@
         <p:spPr>
           <a:xfrm>
             <a:off x="685800" y="4400640"/>
-            <a:ext cx="5486040" cy="3600000"/>
-          </a:xfrm>
-          <a:prstGeom prst="rect">
-            <a:avLst/>
-          </a:prstGeom>
-          <a:noFill/>
-          <a:ln w="0">
-            <a:noFill/>
-          </a:ln>
-        </p:spPr>
-        <p:txBody>
-          <a:bodyPr anchor="t">
+            <a:ext cx="5485680" cy="3599640"/>
+          </a:xfrm>
+          <a:prstGeom prst="rect">
+            <a:avLst/>
+          </a:prstGeom>
+          <a:noFill/>
+          <a:ln w="0">
+            <a:noFill/>
+          </a:ln>
+        </p:spPr>
+        <p:txBody>
+          <a:bodyPr lIns="0" rIns="0" tIns="0" bIns="0" anchor="t">
             <a:noAutofit/>
           </a:bodyPr>
           <a:p>
@@ -945,18 +816,18 @@
         <p:spPr>
           <a:xfrm>
             <a:off x="3884760" y="8685360"/>
-            <a:ext cx="2971440" cy="458280"/>
-          </a:xfrm>
-          <a:prstGeom prst="rect">
-            <a:avLst/>
-          </a:prstGeom>
-          <a:noFill/>
-          <a:ln w="0">
-            <a:noFill/>
-          </a:ln>
-        </p:spPr>
-        <p:txBody>
-          <a:bodyPr anchor="b">
+            <a:ext cx="2971080" cy="457920"/>
+          </a:xfrm>
+          <a:prstGeom prst="rect">
+            <a:avLst/>
+          </a:prstGeom>
+          <a:noFill/>
+          <a:ln w="0">
+            <a:noFill/>
+          </a:ln>
+        </p:spPr>
+        <p:txBody>
+          <a:bodyPr lIns="0" rIns="0" tIns="0" bIns="0" anchor="b">
             <a:noAutofit/>
           </a:bodyPr>
           <a:lstStyle>
@@ -977,7 +848,7 @@
               </a:lnSpc>
               <a:buNone/>
             </a:pPr>
-            <a:fld id="{49D8BF06-31F0-4320-BEDC-72B5EF6AC35E}" type="slidenum">
+            <a:fld id="{5C5580D2-EEC2-42EA-8E6E-D1CE3DFDD250}" type="slidenum">
               <a:rPr b="0" lang="ru-RU" sz="1200" spc="-1" strike="noStrike">
                 <a:latin typeface="Times New Roman"/>
               </a:rPr>
@@ -1018,7 +889,7 @@
             <a:spLocks noGrp="1"/>
           </p:cNvSpPr>
           <p:nvPr>
-            <p:ph type="ftr" idx="2"/>
+            <p:ph type="ftr" idx="1"/>
           </p:nvPr>
         </p:nvSpPr>
         <p:spPr/>
@@ -1038,14 +909,14 @@
             <a:spLocks noGrp="1"/>
           </p:cNvSpPr>
           <p:nvPr>
-            <p:ph type="sldNum" idx="3"/>
+            <p:ph type="sldNum" idx="2"/>
           </p:nvPr>
         </p:nvSpPr>
         <p:spPr/>
         <p:txBody>
           <a:bodyPr/>
           <a:p>
-            <a:fld id="{05147804-8266-44E0-9338-506DE834350F}" type="slidenum">
+            <a:fld id="{4046F51A-C6FB-4DC5-927D-DB6BCDE475DB}" type="slidenum">
               <a:t>&lt;#&gt;</a:t>
             </a:fld>
           </a:p>
@@ -1058,7 +929,7 @@
             <a:spLocks noGrp="1"/>
           </p:cNvSpPr>
           <p:nvPr>
-            <p:ph type="dt" idx="1"/>
+            <p:ph type="dt" idx="3"/>
           </p:nvPr>
         </p:nvSpPr>
         <p:spPr/>
@@ -1107,7 +978,7 @@
         <p:spPr>
           <a:xfrm>
             <a:off x="1143000" y="841680"/>
-            <a:ext cx="6857640" cy="1790280"/>
+            <a:ext cx="6857280" cy="1789920"/>
           </a:xfrm>
           <a:prstGeom prst="rect">
             <a:avLst/>
@@ -1122,11 +993,11 @@
             <a:noAutofit/>
           </a:bodyPr>
           <a:p>
-            <a:endParaRPr b="0" lang="en-US" sz="1800" spc="-1" strike="noStrike">
-              <a:solidFill>
-                <a:srgbClr val="000000"/>
-              </a:solidFill>
-              <a:latin typeface="Calibri"/>
+            <a:pPr algn="ctr">
+              <a:buNone/>
+            </a:pPr>
+            <a:endParaRPr b="0" lang="en-US" sz="4400" spc="-1" strike="noStrike">
+              <a:latin typeface="Arial"/>
             </a:endParaRPr>
           </a:p>
         </p:txBody>
@@ -1159,20 +1030,8 @@
             <a:normAutofit/>
           </a:bodyPr>
           <a:p>
-            <a:pPr>
-              <a:lnSpc>
-                <a:spcPct val="90000"/>
-              </a:lnSpc>
-              <a:spcBef>
-                <a:spcPts val="1417"/>
-              </a:spcBef>
-              <a:buNone/>
-            </a:pPr>
-            <a:endParaRPr b="0" lang="en-US" sz="2100" spc="-1" strike="noStrike">
-              <a:solidFill>
-                <a:srgbClr val="000000"/>
-              </a:solidFill>
-              <a:latin typeface="Calibri"/>
+            <a:endParaRPr b="0" lang="en-US" sz="3200" spc="-1" strike="noStrike">
+              <a:latin typeface="Arial"/>
             </a:endParaRPr>
           </a:p>
         </p:txBody>
@@ -1205,20 +1064,8 @@
             <a:normAutofit/>
           </a:bodyPr>
           <a:p>
-            <a:pPr>
-              <a:lnSpc>
-                <a:spcPct val="90000"/>
-              </a:lnSpc>
-              <a:spcBef>
-                <a:spcPts val="1417"/>
-              </a:spcBef>
-              <a:buNone/>
-            </a:pPr>
-            <a:endParaRPr b="0" lang="en-US" sz="2100" spc="-1" strike="noStrike">
-              <a:solidFill>
-                <a:srgbClr val="000000"/>
-              </a:solidFill>
-              <a:latin typeface="Calibri"/>
+            <a:endParaRPr b="0" lang="en-US" sz="3200" spc="-1" strike="noStrike">
+              <a:latin typeface="Arial"/>
             </a:endParaRPr>
           </a:p>
         </p:txBody>
@@ -1230,7 +1077,7 @@
             <a:spLocks noGrp="1"/>
           </p:cNvSpPr>
           <p:nvPr>
-            <p:ph type="ftr" idx="2"/>
+            <p:ph type="ftr" idx="1"/>
           </p:nvPr>
         </p:nvSpPr>
         <p:spPr/>
@@ -1250,14 +1097,14 @@
             <a:spLocks noGrp="1"/>
           </p:cNvSpPr>
           <p:nvPr>
-            <p:ph type="sldNum" idx="3"/>
+            <p:ph type="sldNum" idx="2"/>
           </p:nvPr>
         </p:nvSpPr>
         <p:spPr/>
         <p:txBody>
           <a:bodyPr/>
           <a:p>
-            <a:fld id="{334FA4EF-3646-45EC-A621-5102D62168E1}" type="slidenum">
+            <a:fld id="{4D49DD1C-063B-47C1-890A-B5A9195A1677}" type="slidenum">
               <a:t>&lt;#&gt;</a:t>
             </a:fld>
           </a:p>
@@ -1270,7 +1117,7 @@
             <a:spLocks noGrp="1"/>
           </p:cNvSpPr>
           <p:nvPr>
-            <p:ph type="dt" idx="1"/>
+            <p:ph type="dt" idx="3"/>
           </p:nvPr>
         </p:nvSpPr>
         <p:spPr/>
@@ -1319,7 +1166,7 @@
         <p:spPr>
           <a:xfrm>
             <a:off x="1143000" y="841680"/>
-            <a:ext cx="6857640" cy="1790280"/>
+            <a:ext cx="6857280" cy="1789920"/>
           </a:xfrm>
           <a:prstGeom prst="rect">
             <a:avLst/>
@@ -1334,11 +1181,11 @@
             <a:noAutofit/>
           </a:bodyPr>
           <a:p>
-            <a:endParaRPr b="0" lang="en-US" sz="1800" spc="-1" strike="noStrike">
-              <a:solidFill>
-                <a:srgbClr val="000000"/>
-              </a:solidFill>
-              <a:latin typeface="Calibri"/>
+            <a:pPr algn="ctr">
+              <a:buNone/>
+            </a:pPr>
+            <a:endParaRPr b="0" lang="en-US" sz="4400" spc="-1" strike="noStrike">
+              <a:latin typeface="Arial"/>
             </a:endParaRPr>
           </a:p>
         </p:txBody>
@@ -1371,20 +1218,8 @@
             <a:normAutofit/>
           </a:bodyPr>
           <a:p>
-            <a:pPr>
-              <a:lnSpc>
-                <a:spcPct val="90000"/>
-              </a:lnSpc>
-              <a:spcBef>
-                <a:spcPts val="1417"/>
-              </a:spcBef>
-              <a:buNone/>
-            </a:pPr>
-            <a:endParaRPr b="0" lang="en-US" sz="2100" spc="-1" strike="noStrike">
-              <a:solidFill>
-                <a:srgbClr val="000000"/>
-              </a:solidFill>
-              <a:latin typeface="Calibri"/>
+            <a:endParaRPr b="0" lang="en-US" sz="3200" spc="-1" strike="noStrike">
+              <a:latin typeface="Arial"/>
             </a:endParaRPr>
           </a:p>
         </p:txBody>
@@ -1417,20 +1252,8 @@
             <a:normAutofit/>
           </a:bodyPr>
           <a:p>
-            <a:pPr>
-              <a:lnSpc>
-                <a:spcPct val="90000"/>
-              </a:lnSpc>
-              <a:spcBef>
-                <a:spcPts val="1417"/>
-              </a:spcBef>
-              <a:buNone/>
-            </a:pPr>
-            <a:endParaRPr b="0" lang="en-US" sz="2100" spc="-1" strike="noStrike">
-              <a:solidFill>
-                <a:srgbClr val="000000"/>
-              </a:solidFill>
-              <a:latin typeface="Calibri"/>
+            <a:endParaRPr b="0" lang="en-US" sz="3200" spc="-1" strike="noStrike">
+              <a:latin typeface="Arial"/>
             </a:endParaRPr>
           </a:p>
         </p:txBody>
@@ -1463,20 +1286,8 @@
             <a:normAutofit/>
           </a:bodyPr>
           <a:p>
-            <a:pPr>
-              <a:lnSpc>
-                <a:spcPct val="90000"/>
-              </a:lnSpc>
-              <a:spcBef>
-                <a:spcPts val="1417"/>
-              </a:spcBef>
-              <a:buNone/>
-            </a:pPr>
-            <a:endParaRPr b="0" lang="en-US" sz="2100" spc="-1" strike="noStrike">
-              <a:solidFill>
-                <a:srgbClr val="000000"/>
-              </a:solidFill>
-              <a:latin typeface="Calibri"/>
+            <a:endParaRPr b="0" lang="en-US" sz="3200" spc="-1" strike="noStrike">
+              <a:latin typeface="Arial"/>
             </a:endParaRPr>
           </a:p>
         </p:txBody>
@@ -1509,20 +1320,8 @@
             <a:normAutofit/>
           </a:bodyPr>
           <a:p>
-            <a:pPr>
-              <a:lnSpc>
-                <a:spcPct val="90000"/>
-              </a:lnSpc>
-              <a:spcBef>
-                <a:spcPts val="1417"/>
-              </a:spcBef>
-              <a:buNone/>
-            </a:pPr>
-            <a:endParaRPr b="0" lang="en-US" sz="2100" spc="-1" strike="noStrike">
-              <a:solidFill>
-                <a:srgbClr val="000000"/>
-              </a:solidFill>
-              <a:latin typeface="Calibri"/>
+            <a:endParaRPr b="0" lang="en-US" sz="3200" spc="-1" strike="noStrike">
+              <a:latin typeface="Arial"/>
             </a:endParaRPr>
           </a:p>
         </p:txBody>
@@ -1534,7 +1333,7 @@
             <a:spLocks noGrp="1"/>
           </p:cNvSpPr>
           <p:nvPr>
-            <p:ph type="ftr" idx="2"/>
+            <p:ph type="ftr" idx="1"/>
           </p:nvPr>
         </p:nvSpPr>
         <p:spPr/>
@@ -1554,14 +1353,14 @@
             <a:spLocks noGrp="1"/>
           </p:cNvSpPr>
           <p:nvPr>
-            <p:ph type="sldNum" idx="3"/>
+            <p:ph type="sldNum" idx="2"/>
           </p:nvPr>
         </p:nvSpPr>
         <p:spPr/>
         <p:txBody>
           <a:bodyPr/>
           <a:p>
-            <a:fld id="{41EDA6E5-DC52-4F21-A816-1BAEB9A053D7}" type="slidenum">
+            <a:fld id="{08B398AE-41E9-4A4C-9307-C07A815F917F}" type="slidenum">
               <a:t>&lt;#&gt;</a:t>
             </a:fld>
           </a:p>
@@ -1574,7 +1373,7 @@
             <a:spLocks noGrp="1"/>
           </p:cNvSpPr>
           <p:nvPr>
-            <p:ph type="dt" idx="1"/>
+            <p:ph type="dt" idx="3"/>
           </p:nvPr>
         </p:nvSpPr>
         <p:spPr/>
@@ -1623,7 +1422,7 @@
         <p:spPr>
           <a:xfrm>
             <a:off x="1143000" y="841680"/>
-            <a:ext cx="6857640" cy="1790280"/>
+            <a:ext cx="6857280" cy="1789920"/>
           </a:xfrm>
           <a:prstGeom prst="rect">
             <a:avLst/>
@@ -1638,11 +1437,11 @@
             <a:noAutofit/>
           </a:bodyPr>
           <a:p>
-            <a:endParaRPr b="0" lang="en-US" sz="1800" spc="-1" strike="noStrike">
-              <a:solidFill>
-                <a:srgbClr val="000000"/>
-              </a:solidFill>
-              <a:latin typeface="Calibri"/>
+            <a:pPr algn="ctr">
+              <a:buNone/>
+            </a:pPr>
+            <a:endParaRPr b="0" lang="en-US" sz="4400" spc="-1" strike="noStrike">
+              <a:latin typeface="Arial"/>
             </a:endParaRPr>
           </a:p>
         </p:txBody>
@@ -1675,20 +1474,8 @@
             <a:normAutofit/>
           </a:bodyPr>
           <a:p>
-            <a:pPr>
-              <a:lnSpc>
-                <a:spcPct val="90000"/>
-              </a:lnSpc>
-              <a:spcBef>
-                <a:spcPts val="1417"/>
-              </a:spcBef>
-              <a:buNone/>
-            </a:pPr>
-            <a:endParaRPr b="0" lang="en-US" sz="2100" spc="-1" strike="noStrike">
-              <a:solidFill>
-                <a:srgbClr val="000000"/>
-              </a:solidFill>
-              <a:latin typeface="Calibri"/>
+            <a:endParaRPr b="0" lang="en-US" sz="3200" spc="-1" strike="noStrike">
+              <a:latin typeface="Arial"/>
             </a:endParaRPr>
           </a:p>
         </p:txBody>
@@ -1721,20 +1508,8 @@
             <a:normAutofit/>
           </a:bodyPr>
           <a:p>
-            <a:pPr>
-              <a:lnSpc>
-                <a:spcPct val="90000"/>
-              </a:lnSpc>
-              <a:spcBef>
-                <a:spcPts val="1417"/>
-              </a:spcBef>
-              <a:buNone/>
-            </a:pPr>
-            <a:endParaRPr b="0" lang="en-US" sz="2100" spc="-1" strike="noStrike">
-              <a:solidFill>
-                <a:srgbClr val="000000"/>
-              </a:solidFill>
-              <a:latin typeface="Calibri"/>
+            <a:endParaRPr b="0" lang="en-US" sz="3200" spc="-1" strike="noStrike">
+              <a:latin typeface="Arial"/>
             </a:endParaRPr>
           </a:p>
         </p:txBody>
@@ -1767,20 +1542,8 @@
             <a:normAutofit/>
           </a:bodyPr>
           <a:p>
-            <a:pPr>
-              <a:lnSpc>
-                <a:spcPct val="90000"/>
-              </a:lnSpc>
-              <a:spcBef>
-                <a:spcPts val="1417"/>
-              </a:spcBef>
-              <a:buNone/>
-            </a:pPr>
-            <a:endParaRPr b="0" lang="en-US" sz="2100" spc="-1" strike="noStrike">
-              <a:solidFill>
-                <a:srgbClr val="000000"/>
-              </a:solidFill>
-              <a:latin typeface="Calibri"/>
+            <a:endParaRPr b="0" lang="en-US" sz="3200" spc="-1" strike="noStrike">
+              <a:latin typeface="Arial"/>
             </a:endParaRPr>
           </a:p>
         </p:txBody>
@@ -1813,20 +1576,8 @@
             <a:normAutofit/>
           </a:bodyPr>
           <a:p>
-            <a:pPr>
-              <a:lnSpc>
-                <a:spcPct val="90000"/>
-              </a:lnSpc>
-              <a:spcBef>
-                <a:spcPts val="1417"/>
-              </a:spcBef>
-              <a:buNone/>
-            </a:pPr>
-            <a:endParaRPr b="0" lang="en-US" sz="2100" spc="-1" strike="noStrike">
-              <a:solidFill>
-                <a:srgbClr val="000000"/>
-              </a:solidFill>
-              <a:latin typeface="Calibri"/>
+            <a:endParaRPr b="0" lang="en-US" sz="3200" spc="-1" strike="noStrike">
+              <a:latin typeface="Arial"/>
             </a:endParaRPr>
           </a:p>
         </p:txBody>
@@ -1859,20 +1610,8 @@
             <a:normAutofit/>
           </a:bodyPr>
           <a:p>
-            <a:pPr>
-              <a:lnSpc>
-                <a:spcPct val="90000"/>
-              </a:lnSpc>
-              <a:spcBef>
-                <a:spcPts val="1417"/>
-              </a:spcBef>
-              <a:buNone/>
-            </a:pPr>
-            <a:endParaRPr b="0" lang="en-US" sz="2100" spc="-1" strike="noStrike">
-              <a:solidFill>
-                <a:srgbClr val="000000"/>
-              </a:solidFill>
-              <a:latin typeface="Calibri"/>
+            <a:endParaRPr b="0" lang="en-US" sz="3200" spc="-1" strike="noStrike">
+              <a:latin typeface="Arial"/>
             </a:endParaRPr>
           </a:p>
         </p:txBody>
@@ -1905,20 +1644,8 @@
             <a:normAutofit/>
           </a:bodyPr>
           <a:p>
-            <a:pPr>
-              <a:lnSpc>
-                <a:spcPct val="90000"/>
-              </a:lnSpc>
-              <a:spcBef>
-                <a:spcPts val="1417"/>
-              </a:spcBef>
-              <a:buNone/>
-            </a:pPr>
-            <a:endParaRPr b="0" lang="en-US" sz="2100" spc="-1" strike="noStrike">
-              <a:solidFill>
-                <a:srgbClr val="000000"/>
-              </a:solidFill>
-              <a:latin typeface="Calibri"/>
+            <a:endParaRPr b="0" lang="en-US" sz="3200" spc="-1" strike="noStrike">
+              <a:latin typeface="Arial"/>
             </a:endParaRPr>
           </a:p>
         </p:txBody>
@@ -1930,7 +1657,7 @@
             <a:spLocks noGrp="1"/>
           </p:cNvSpPr>
           <p:nvPr>
-            <p:ph type="ftr" idx="2"/>
+            <p:ph type="ftr" idx="1"/>
           </p:nvPr>
         </p:nvSpPr>
         <p:spPr/>
@@ -1950,14 +1677,14 @@
             <a:spLocks noGrp="1"/>
           </p:cNvSpPr>
           <p:nvPr>
-            <p:ph type="sldNum" idx="3"/>
+            <p:ph type="sldNum" idx="2"/>
           </p:nvPr>
         </p:nvSpPr>
         <p:spPr/>
         <p:txBody>
           <a:bodyPr/>
           <a:p>
-            <a:fld id="{B8371158-855E-4215-BEE8-E28456E93552}" type="slidenum">
+            <a:fld id="{76056121-E6FC-4133-B8FA-9F8E0ABEBDB9}" type="slidenum">
               <a:t>&lt;#&gt;</a:t>
             </a:fld>
           </a:p>
@@ -1970,7 +1697,7 @@
             <a:spLocks noGrp="1"/>
           </p:cNvSpPr>
           <p:nvPr>
-            <p:ph type="dt" idx="1"/>
+            <p:ph type="dt" idx="3"/>
           </p:nvPr>
         </p:nvSpPr>
         <p:spPr/>
@@ -2019,7 +1746,7 @@
         <p:spPr>
           <a:xfrm>
             <a:off x="1143000" y="841680"/>
-            <a:ext cx="6857640" cy="1790280"/>
+            <a:ext cx="6857280" cy="1789920"/>
           </a:xfrm>
           <a:prstGeom prst="rect">
             <a:avLst/>
@@ -2034,11 +1761,11 @@
             <a:noAutofit/>
           </a:bodyPr>
           <a:p>
-            <a:endParaRPr b="0" lang="en-US" sz="1800" spc="-1" strike="noStrike">
-              <a:solidFill>
-                <a:srgbClr val="000000"/>
-              </a:solidFill>
-              <a:latin typeface="Calibri"/>
+            <a:pPr algn="ctr">
+              <a:buNone/>
+            </a:pPr>
+            <a:endParaRPr b="0" lang="en-US" sz="4400" spc="-1" strike="noStrike">
+              <a:latin typeface="Arial"/>
             </a:endParaRPr>
           </a:p>
         </p:txBody>
@@ -2087,7 +1814,7 @@
             <a:spLocks noGrp="1"/>
           </p:cNvSpPr>
           <p:nvPr>
-            <p:ph type="ftr" idx="2"/>
+            <p:ph type="ftr" idx="1"/>
           </p:nvPr>
         </p:nvSpPr>
         <p:spPr/>
@@ -2107,14 +1834,14 @@
             <a:spLocks noGrp="1"/>
           </p:cNvSpPr>
           <p:nvPr>
-            <p:ph type="sldNum" idx="3"/>
+            <p:ph type="sldNum" idx="2"/>
           </p:nvPr>
         </p:nvSpPr>
         <p:spPr/>
         <p:txBody>
           <a:bodyPr/>
           <a:p>
-            <a:fld id="{A344A633-C7D4-415A-84BC-C0F5DF399F48}" type="slidenum">
+            <a:fld id="{77195E8E-08B3-4C2A-AE87-77166A81651E}" type="slidenum">
               <a:t>&lt;#&gt;</a:t>
             </a:fld>
           </a:p>
@@ -2127,7 +1854,7 @@
             <a:spLocks noGrp="1"/>
           </p:cNvSpPr>
           <p:nvPr>
-            <p:ph type="dt" idx="1"/>
+            <p:ph type="dt" idx="3"/>
           </p:nvPr>
         </p:nvSpPr>
         <p:spPr/>
@@ -2176,7 +1903,7 @@
         <p:spPr>
           <a:xfrm>
             <a:off x="1143000" y="841680"/>
-            <a:ext cx="6857640" cy="1790280"/>
+            <a:ext cx="6857280" cy="1789920"/>
           </a:xfrm>
           <a:prstGeom prst="rect">
             <a:avLst/>
@@ -2191,11 +1918,11 @@
             <a:noAutofit/>
           </a:bodyPr>
           <a:p>
-            <a:endParaRPr b="0" lang="en-US" sz="1800" spc="-1" strike="noStrike">
-              <a:solidFill>
-                <a:srgbClr val="000000"/>
-              </a:solidFill>
-              <a:latin typeface="Calibri"/>
+            <a:pPr algn="ctr">
+              <a:buNone/>
+            </a:pPr>
+            <a:endParaRPr b="0" lang="en-US" sz="4400" spc="-1" strike="noStrike">
+              <a:latin typeface="Arial"/>
             </a:endParaRPr>
           </a:p>
         </p:txBody>
@@ -2228,20 +1955,8 @@
             <a:normAutofit/>
           </a:bodyPr>
           <a:p>
-            <a:pPr>
-              <a:lnSpc>
-                <a:spcPct val="90000"/>
-              </a:lnSpc>
-              <a:spcBef>
-                <a:spcPts val="1417"/>
-              </a:spcBef>
-              <a:buNone/>
-            </a:pPr>
-            <a:endParaRPr b="0" lang="en-US" sz="2100" spc="-1" strike="noStrike">
-              <a:solidFill>
-                <a:srgbClr val="000000"/>
-              </a:solidFill>
-              <a:latin typeface="Calibri"/>
+            <a:endParaRPr b="0" lang="en-US" sz="3200" spc="-1" strike="noStrike">
+              <a:latin typeface="Arial"/>
             </a:endParaRPr>
           </a:p>
         </p:txBody>
@@ -2253,7 +1968,7 @@
             <a:spLocks noGrp="1"/>
           </p:cNvSpPr>
           <p:nvPr>
-            <p:ph type="ftr" idx="2"/>
+            <p:ph type="ftr" idx="1"/>
           </p:nvPr>
         </p:nvSpPr>
         <p:spPr/>
@@ -2273,14 +1988,14 @@
             <a:spLocks noGrp="1"/>
           </p:cNvSpPr>
           <p:nvPr>
-            <p:ph type="sldNum" idx="3"/>
+            <p:ph type="sldNum" idx="2"/>
           </p:nvPr>
         </p:nvSpPr>
         <p:spPr/>
         <p:txBody>
           <a:bodyPr/>
           <a:p>
-            <a:fld id="{31F18926-DC36-45EF-ABEA-FFA8FA03109A}" type="slidenum">
+            <a:fld id="{2008B370-4987-4812-A754-A5CDD0B67435}" type="slidenum">
               <a:t>&lt;#&gt;</a:t>
             </a:fld>
           </a:p>
@@ -2293,7 +2008,7 @@
             <a:spLocks noGrp="1"/>
           </p:cNvSpPr>
           <p:nvPr>
-            <p:ph type="dt" idx="1"/>
+            <p:ph type="dt" idx="3"/>
           </p:nvPr>
         </p:nvSpPr>
         <p:spPr/>
@@ -2342,7 +2057,7 @@
         <p:spPr>
           <a:xfrm>
             <a:off x="1143000" y="841680"/>
-            <a:ext cx="6857640" cy="1790280"/>
+            <a:ext cx="6857280" cy="1789920"/>
           </a:xfrm>
           <a:prstGeom prst="rect">
             <a:avLst/>
@@ -2357,11 +2072,11 @@
             <a:noAutofit/>
           </a:bodyPr>
           <a:p>
-            <a:endParaRPr b="0" lang="en-US" sz="1800" spc="-1" strike="noStrike">
-              <a:solidFill>
-                <a:srgbClr val="000000"/>
-              </a:solidFill>
-              <a:latin typeface="Calibri"/>
+            <a:pPr algn="ctr">
+              <a:buNone/>
+            </a:pPr>
+            <a:endParaRPr b="0" lang="en-US" sz="4400" spc="-1" strike="noStrike">
+              <a:latin typeface="Arial"/>
             </a:endParaRPr>
           </a:p>
         </p:txBody>
@@ -2394,20 +2109,8 @@
             <a:normAutofit/>
           </a:bodyPr>
           <a:p>
-            <a:pPr>
-              <a:lnSpc>
-                <a:spcPct val="90000"/>
-              </a:lnSpc>
-              <a:spcBef>
-                <a:spcPts val="1417"/>
-              </a:spcBef>
-              <a:buNone/>
-            </a:pPr>
-            <a:endParaRPr b="0" lang="en-US" sz="2100" spc="-1" strike="noStrike">
-              <a:solidFill>
-                <a:srgbClr val="000000"/>
-              </a:solidFill>
-              <a:latin typeface="Calibri"/>
+            <a:endParaRPr b="0" lang="en-US" sz="3200" spc="-1" strike="noStrike">
+              <a:latin typeface="Arial"/>
             </a:endParaRPr>
           </a:p>
         </p:txBody>
@@ -2440,20 +2143,8 @@
             <a:normAutofit/>
           </a:bodyPr>
           <a:p>
-            <a:pPr>
-              <a:lnSpc>
-                <a:spcPct val="90000"/>
-              </a:lnSpc>
-              <a:spcBef>
-                <a:spcPts val="1417"/>
-              </a:spcBef>
-              <a:buNone/>
-            </a:pPr>
-            <a:endParaRPr b="0" lang="en-US" sz="2100" spc="-1" strike="noStrike">
-              <a:solidFill>
-                <a:srgbClr val="000000"/>
-              </a:solidFill>
-              <a:latin typeface="Calibri"/>
+            <a:endParaRPr b="0" lang="en-US" sz="3200" spc="-1" strike="noStrike">
+              <a:latin typeface="Arial"/>
             </a:endParaRPr>
           </a:p>
         </p:txBody>
@@ -2465,7 +2156,7 @@
             <a:spLocks noGrp="1"/>
           </p:cNvSpPr>
           <p:nvPr>
-            <p:ph type="ftr" idx="2"/>
+            <p:ph type="ftr" idx="1"/>
           </p:nvPr>
         </p:nvSpPr>
         <p:spPr/>
@@ -2485,14 +2176,14 @@
             <a:spLocks noGrp="1"/>
           </p:cNvSpPr>
           <p:nvPr>
-            <p:ph type="sldNum" idx="3"/>
+            <p:ph type="sldNum" idx="2"/>
           </p:nvPr>
         </p:nvSpPr>
         <p:spPr/>
         <p:txBody>
           <a:bodyPr/>
           <a:p>
-            <a:fld id="{97C2E88D-4968-4A81-BFE8-710E123C61B8}" type="slidenum">
+            <a:fld id="{0DE43CB7-26DC-4418-B804-84411FAD5922}" type="slidenum">
               <a:t>&lt;#&gt;</a:t>
             </a:fld>
           </a:p>
@@ -2505,7 +2196,7 @@
             <a:spLocks noGrp="1"/>
           </p:cNvSpPr>
           <p:nvPr>
-            <p:ph type="dt" idx="1"/>
+            <p:ph type="dt" idx="3"/>
           </p:nvPr>
         </p:nvSpPr>
         <p:spPr/>
@@ -2554,7 +2245,7 @@
         <p:spPr>
           <a:xfrm>
             <a:off x="1143000" y="841680"/>
-            <a:ext cx="6857640" cy="1790280"/>
+            <a:ext cx="6857280" cy="1789920"/>
           </a:xfrm>
           <a:prstGeom prst="rect">
             <a:avLst/>
@@ -2569,11 +2260,11 @@
             <a:noAutofit/>
           </a:bodyPr>
           <a:p>
-            <a:endParaRPr b="0" lang="en-US" sz="1800" spc="-1" strike="noStrike">
-              <a:solidFill>
-                <a:srgbClr val="000000"/>
-              </a:solidFill>
-              <a:latin typeface="Calibri"/>
+            <a:pPr algn="ctr">
+              <a:buNone/>
+            </a:pPr>
+            <a:endParaRPr b="0" lang="en-US" sz="4400" spc="-1" strike="noStrike">
+              <a:latin typeface="Arial"/>
             </a:endParaRPr>
           </a:p>
         </p:txBody>
@@ -2585,7 +2276,7 @@
             <a:spLocks noGrp="1"/>
           </p:cNvSpPr>
           <p:nvPr>
-            <p:ph type="ftr" idx="2"/>
+            <p:ph type="ftr" idx="1"/>
           </p:nvPr>
         </p:nvSpPr>
         <p:spPr/>
@@ -2605,14 +2296,14 @@
             <a:spLocks noGrp="1"/>
           </p:cNvSpPr>
           <p:nvPr>
-            <p:ph type="sldNum" idx="3"/>
+            <p:ph type="sldNum" idx="2"/>
           </p:nvPr>
         </p:nvSpPr>
         <p:spPr/>
         <p:txBody>
           <a:bodyPr/>
           <a:p>
-            <a:fld id="{D7468A07-BF54-4F4E-93FA-A9FC87272F4F}" type="slidenum">
+            <a:fld id="{EB65D2C8-425E-4550-8DAB-66AFD0F410E7}" type="slidenum">
               <a:t>&lt;#&gt;</a:t>
             </a:fld>
           </a:p>
@@ -2625,7 +2316,7 @@
             <a:spLocks noGrp="1"/>
           </p:cNvSpPr>
           <p:nvPr>
-            <p:ph type="dt" idx="1"/>
+            <p:ph type="dt" idx="3"/>
           </p:nvPr>
         </p:nvSpPr>
         <p:spPr/>
@@ -2674,7 +2365,7 @@
         <p:spPr>
           <a:xfrm>
             <a:off x="1143000" y="841680"/>
-            <a:ext cx="6857640" cy="8299800"/>
+            <a:ext cx="6857280" cy="8298360"/>
           </a:xfrm>
           <a:prstGeom prst="rect">
             <a:avLst/>
@@ -2705,7 +2396,7 @@
             <a:spLocks noGrp="1"/>
           </p:cNvSpPr>
           <p:nvPr>
-            <p:ph type="ftr" idx="2"/>
+            <p:ph type="ftr" idx="1"/>
           </p:nvPr>
         </p:nvSpPr>
         <p:spPr/>
@@ -2725,14 +2416,14 @@
             <a:spLocks noGrp="1"/>
           </p:cNvSpPr>
           <p:nvPr>
-            <p:ph type="sldNum" idx="3"/>
+            <p:ph type="sldNum" idx="2"/>
           </p:nvPr>
         </p:nvSpPr>
         <p:spPr/>
         <p:txBody>
           <a:bodyPr/>
           <a:p>
-            <a:fld id="{DA3F69CD-0118-4452-B3E1-2C1418B0E5E7}" type="slidenum">
+            <a:fld id="{A3E99E0B-DAD9-46A7-9810-AD89B37D54EC}" type="slidenum">
               <a:t>&lt;#&gt;</a:t>
             </a:fld>
           </a:p>
@@ -2745,7 +2436,7 @@
             <a:spLocks noGrp="1"/>
           </p:cNvSpPr>
           <p:nvPr>
-            <p:ph type="dt" idx="1"/>
+            <p:ph type="dt" idx="3"/>
           </p:nvPr>
         </p:nvSpPr>
         <p:spPr/>
@@ -2794,7 +2485,7 @@
         <p:spPr>
           <a:xfrm>
             <a:off x="1143000" y="841680"/>
-            <a:ext cx="6857640" cy="1790280"/>
+            <a:ext cx="6857280" cy="1789920"/>
           </a:xfrm>
           <a:prstGeom prst="rect">
             <a:avLst/>
@@ -2809,11 +2500,11 @@
             <a:noAutofit/>
           </a:bodyPr>
           <a:p>
-            <a:endParaRPr b="0" lang="en-US" sz="1800" spc="-1" strike="noStrike">
-              <a:solidFill>
-                <a:srgbClr val="000000"/>
-              </a:solidFill>
-              <a:latin typeface="Calibri"/>
+            <a:pPr algn="ctr">
+              <a:buNone/>
+            </a:pPr>
+            <a:endParaRPr b="0" lang="en-US" sz="4400" spc="-1" strike="noStrike">
+              <a:latin typeface="Arial"/>
             </a:endParaRPr>
           </a:p>
         </p:txBody>
@@ -2846,20 +2537,8 @@
             <a:normAutofit/>
           </a:bodyPr>
           <a:p>
-            <a:pPr>
-              <a:lnSpc>
-                <a:spcPct val="90000"/>
-              </a:lnSpc>
-              <a:spcBef>
-                <a:spcPts val="1417"/>
-              </a:spcBef>
-              <a:buNone/>
-            </a:pPr>
-            <a:endParaRPr b="0" lang="en-US" sz="2100" spc="-1" strike="noStrike">
-              <a:solidFill>
-                <a:srgbClr val="000000"/>
-              </a:solidFill>
-              <a:latin typeface="Calibri"/>
+            <a:endParaRPr b="0" lang="en-US" sz="3200" spc="-1" strike="noStrike">
+              <a:latin typeface="Arial"/>
             </a:endParaRPr>
           </a:p>
         </p:txBody>
@@ -2892,20 +2571,8 @@
             <a:normAutofit/>
           </a:bodyPr>
           <a:p>
-            <a:pPr>
-              <a:lnSpc>
-                <a:spcPct val="90000"/>
-              </a:lnSpc>
-              <a:spcBef>
-                <a:spcPts val="1417"/>
-              </a:spcBef>
-              <a:buNone/>
-            </a:pPr>
-            <a:endParaRPr b="0" lang="en-US" sz="2100" spc="-1" strike="noStrike">
-              <a:solidFill>
-                <a:srgbClr val="000000"/>
-              </a:solidFill>
-              <a:latin typeface="Calibri"/>
+            <a:endParaRPr b="0" lang="en-US" sz="3200" spc="-1" strike="noStrike">
+              <a:latin typeface="Arial"/>
             </a:endParaRPr>
           </a:p>
         </p:txBody>
@@ -2938,20 +2605,8 @@
             <a:normAutofit/>
           </a:bodyPr>
           <a:p>
-            <a:pPr>
-              <a:lnSpc>
-                <a:spcPct val="90000"/>
-              </a:lnSpc>
-              <a:spcBef>
-                <a:spcPts val="1417"/>
-              </a:spcBef>
-              <a:buNone/>
-            </a:pPr>
-            <a:endParaRPr b="0" lang="en-US" sz="2100" spc="-1" strike="noStrike">
-              <a:solidFill>
-                <a:srgbClr val="000000"/>
-              </a:solidFill>
-              <a:latin typeface="Calibri"/>
+            <a:endParaRPr b="0" lang="en-US" sz="3200" spc="-1" strike="noStrike">
+              <a:latin typeface="Arial"/>
             </a:endParaRPr>
           </a:p>
         </p:txBody>
@@ -2963,7 +2618,7 @@
             <a:spLocks noGrp="1"/>
           </p:cNvSpPr>
           <p:nvPr>
-            <p:ph type="ftr" idx="2"/>
+            <p:ph type="ftr" idx="1"/>
           </p:nvPr>
         </p:nvSpPr>
         <p:spPr/>
@@ -2983,14 +2638,14 @@
             <a:spLocks noGrp="1"/>
           </p:cNvSpPr>
           <p:nvPr>
-            <p:ph type="sldNum" idx="3"/>
+            <p:ph type="sldNum" idx="2"/>
           </p:nvPr>
         </p:nvSpPr>
         <p:spPr/>
         <p:txBody>
           <a:bodyPr/>
           <a:p>
-            <a:fld id="{874E0D54-12C5-4CB6-82D3-B2A35D325486}" type="slidenum">
+            <a:fld id="{A343A759-C640-469F-9F60-1B4DD1C4C959}" type="slidenum">
               <a:t>&lt;#&gt;</a:t>
             </a:fld>
           </a:p>
@@ -3003,7 +2658,7 @@
             <a:spLocks noGrp="1"/>
           </p:cNvSpPr>
           <p:nvPr>
-            <p:ph type="dt" idx="1"/>
+            <p:ph type="dt" idx="3"/>
           </p:nvPr>
         </p:nvSpPr>
         <p:spPr/>
@@ -3052,7 +2707,7 @@
         <p:spPr>
           <a:xfrm>
             <a:off x="1143000" y="841680"/>
-            <a:ext cx="6857640" cy="1790280"/>
+            <a:ext cx="6857280" cy="1789920"/>
           </a:xfrm>
           <a:prstGeom prst="rect">
             <a:avLst/>
@@ -3067,11 +2722,11 @@
             <a:noAutofit/>
           </a:bodyPr>
           <a:p>
-            <a:endParaRPr b="0" lang="en-US" sz="1800" spc="-1" strike="noStrike">
-              <a:solidFill>
-                <a:srgbClr val="000000"/>
-              </a:solidFill>
-              <a:latin typeface="Calibri"/>
+            <a:pPr algn="ctr">
+              <a:buNone/>
+            </a:pPr>
+            <a:endParaRPr b="0" lang="en-US" sz="4400" spc="-1" strike="noStrike">
+              <a:latin typeface="Arial"/>
             </a:endParaRPr>
           </a:p>
         </p:txBody>
@@ -3104,20 +2759,8 @@
             <a:normAutofit/>
           </a:bodyPr>
           <a:p>
-            <a:pPr>
-              <a:lnSpc>
-                <a:spcPct val="90000"/>
-              </a:lnSpc>
-              <a:spcBef>
-                <a:spcPts val="1417"/>
-              </a:spcBef>
-              <a:buNone/>
-            </a:pPr>
-            <a:endParaRPr b="0" lang="en-US" sz="2100" spc="-1" strike="noStrike">
-              <a:solidFill>
-                <a:srgbClr val="000000"/>
-              </a:solidFill>
-              <a:latin typeface="Calibri"/>
+            <a:endParaRPr b="0" lang="en-US" sz="3200" spc="-1" strike="noStrike">
+              <a:latin typeface="Arial"/>
             </a:endParaRPr>
           </a:p>
         </p:txBody>
@@ -3150,20 +2793,8 @@
             <a:normAutofit/>
           </a:bodyPr>
           <a:p>
-            <a:pPr>
-              <a:lnSpc>
-                <a:spcPct val="90000"/>
-              </a:lnSpc>
-              <a:spcBef>
-                <a:spcPts val="1417"/>
-              </a:spcBef>
-              <a:buNone/>
-            </a:pPr>
-            <a:endParaRPr b="0" lang="en-US" sz="2100" spc="-1" strike="noStrike">
-              <a:solidFill>
-                <a:srgbClr val="000000"/>
-              </a:solidFill>
-              <a:latin typeface="Calibri"/>
+            <a:endParaRPr b="0" lang="en-US" sz="3200" spc="-1" strike="noStrike">
+              <a:latin typeface="Arial"/>
             </a:endParaRPr>
           </a:p>
         </p:txBody>
@@ -3196,20 +2827,8 @@
             <a:normAutofit/>
           </a:bodyPr>
           <a:p>
-            <a:pPr>
-              <a:lnSpc>
-                <a:spcPct val="90000"/>
-              </a:lnSpc>
-              <a:spcBef>
-                <a:spcPts val="1417"/>
-              </a:spcBef>
-              <a:buNone/>
-            </a:pPr>
-            <a:endParaRPr b="0" lang="en-US" sz="2100" spc="-1" strike="noStrike">
-              <a:solidFill>
-                <a:srgbClr val="000000"/>
-              </a:solidFill>
-              <a:latin typeface="Calibri"/>
+            <a:endParaRPr b="0" lang="en-US" sz="3200" spc="-1" strike="noStrike">
+              <a:latin typeface="Arial"/>
             </a:endParaRPr>
           </a:p>
         </p:txBody>
@@ -3221,7 +2840,7 @@
             <a:spLocks noGrp="1"/>
           </p:cNvSpPr>
           <p:nvPr>
-            <p:ph type="ftr" idx="2"/>
+            <p:ph type="ftr" idx="1"/>
           </p:nvPr>
         </p:nvSpPr>
         <p:spPr/>
@@ -3241,14 +2860,14 @@
             <a:spLocks noGrp="1"/>
           </p:cNvSpPr>
           <p:nvPr>
-            <p:ph type="sldNum" idx="3"/>
+            <p:ph type="sldNum" idx="2"/>
           </p:nvPr>
         </p:nvSpPr>
         <p:spPr/>
         <p:txBody>
           <a:bodyPr/>
           <a:p>
-            <a:fld id="{62B64FF8-6203-4DF9-8205-B3E603B947CF}" type="slidenum">
+            <a:fld id="{3F621A3A-4A8A-4811-918C-7FCE5E4E5D01}" type="slidenum">
               <a:t>&lt;#&gt;</a:t>
             </a:fld>
           </a:p>
@@ -3261,7 +2880,7 @@
             <a:spLocks noGrp="1"/>
           </p:cNvSpPr>
           <p:nvPr>
-            <p:ph type="dt" idx="1"/>
+            <p:ph type="dt" idx="3"/>
           </p:nvPr>
         </p:nvSpPr>
         <p:spPr/>
@@ -3310,7 +2929,7 @@
         <p:spPr>
           <a:xfrm>
             <a:off x="1143000" y="841680"/>
-            <a:ext cx="6857640" cy="1790280"/>
+            <a:ext cx="6857280" cy="1789920"/>
           </a:xfrm>
           <a:prstGeom prst="rect">
             <a:avLst/>
@@ -3325,11 +2944,11 @@
             <a:noAutofit/>
           </a:bodyPr>
           <a:p>
-            <a:endParaRPr b="0" lang="en-US" sz="1800" spc="-1" strike="noStrike">
-              <a:solidFill>
-                <a:srgbClr val="000000"/>
-              </a:solidFill>
-              <a:latin typeface="Calibri"/>
+            <a:pPr algn="ctr">
+              <a:buNone/>
+            </a:pPr>
+            <a:endParaRPr b="0" lang="en-US" sz="4400" spc="-1" strike="noStrike">
+              <a:latin typeface="Arial"/>
             </a:endParaRPr>
           </a:p>
         </p:txBody>
@@ -3362,20 +2981,8 @@
             <a:normAutofit/>
           </a:bodyPr>
           <a:p>
-            <a:pPr>
-              <a:lnSpc>
-                <a:spcPct val="90000"/>
-              </a:lnSpc>
-              <a:spcBef>
-                <a:spcPts val="1417"/>
-              </a:spcBef>
-              <a:buNone/>
-            </a:pPr>
-            <a:endParaRPr b="0" lang="en-US" sz="2100" spc="-1" strike="noStrike">
-              <a:solidFill>
-                <a:srgbClr val="000000"/>
-              </a:solidFill>
-              <a:latin typeface="Calibri"/>
+            <a:endParaRPr b="0" lang="en-US" sz="3200" spc="-1" strike="noStrike">
+              <a:latin typeface="Arial"/>
             </a:endParaRPr>
           </a:p>
         </p:txBody>
@@ -3408,20 +3015,8 @@
             <a:normAutofit/>
           </a:bodyPr>
           <a:p>
-            <a:pPr>
-              <a:lnSpc>
-                <a:spcPct val="90000"/>
-              </a:lnSpc>
-              <a:spcBef>
-                <a:spcPts val="1417"/>
-              </a:spcBef>
-              <a:buNone/>
-            </a:pPr>
-            <a:endParaRPr b="0" lang="en-US" sz="2100" spc="-1" strike="noStrike">
-              <a:solidFill>
-                <a:srgbClr val="000000"/>
-              </a:solidFill>
-              <a:latin typeface="Calibri"/>
+            <a:endParaRPr b="0" lang="en-US" sz="3200" spc="-1" strike="noStrike">
+              <a:latin typeface="Arial"/>
             </a:endParaRPr>
           </a:p>
         </p:txBody>
@@ -3454,20 +3049,8 @@
             <a:normAutofit/>
           </a:bodyPr>
           <a:p>
-            <a:pPr>
-              <a:lnSpc>
-                <a:spcPct val="90000"/>
-              </a:lnSpc>
-              <a:spcBef>
-                <a:spcPts val="1417"/>
-              </a:spcBef>
-              <a:buNone/>
-            </a:pPr>
-            <a:endParaRPr b="0" lang="en-US" sz="2100" spc="-1" strike="noStrike">
-              <a:solidFill>
-                <a:srgbClr val="000000"/>
-              </a:solidFill>
-              <a:latin typeface="Calibri"/>
+            <a:endParaRPr b="0" lang="en-US" sz="3200" spc="-1" strike="noStrike">
+              <a:latin typeface="Arial"/>
             </a:endParaRPr>
           </a:p>
         </p:txBody>
@@ -3479,7 +3062,7 @@
             <a:spLocks noGrp="1"/>
           </p:cNvSpPr>
           <p:nvPr>
-            <p:ph type="ftr" idx="2"/>
+            <p:ph type="ftr" idx="1"/>
           </p:nvPr>
         </p:nvSpPr>
         <p:spPr/>
@@ -3499,14 +3082,14 @@
             <a:spLocks noGrp="1"/>
           </p:cNvSpPr>
           <p:nvPr>
-            <p:ph type="sldNum" idx="3"/>
+            <p:ph type="sldNum" idx="2"/>
           </p:nvPr>
         </p:nvSpPr>
         <p:spPr/>
         <p:txBody>
           <a:bodyPr/>
           <a:p>
-            <a:fld id="{360F32EF-E53B-4207-B87B-DA41232B8FC8}" type="slidenum">
+            <a:fld id="{E0A68F3D-D41F-4FF2-98E7-5A2464A971F5}" type="slidenum">
               <a:t>&lt;#&gt;</a:t>
             </a:fld>
           </a:p>
@@ -3519,7 +3102,7 @@
             <a:spLocks noGrp="1"/>
           </p:cNvSpPr>
           <p:nvPr>
-            <p:ph type="dt" idx="1"/>
+            <p:ph type="dt" idx="3"/>
           </p:nvPr>
         </p:nvSpPr>
         <p:spPr/>
@@ -3575,41 +3158,29 @@
         <p:spPr>
           <a:xfrm>
             <a:off x="1143000" y="841680"/>
-            <a:ext cx="6857640" cy="1790280"/>
-          </a:xfrm>
-          <a:prstGeom prst="rect">
-            <a:avLst/>
-          </a:prstGeom>
-          <a:noFill/>
-          <a:ln w="0">
-            <a:noFill/>
-          </a:ln>
-        </p:spPr>
-        <p:txBody>
-          <a:bodyPr anchor="b">
-            <a:noAutofit/>
-          </a:bodyPr>
-          <a:p>
-            <a:pPr algn="ctr">
-              <a:lnSpc>
-                <a:spcPct val="90000"/>
-              </a:lnSpc>
-              <a:buNone/>
-            </a:pPr>
-            <a:r>
-              <a:rPr b="0" lang="ru-RU" sz="4500" spc="-1" strike="noStrike">
-                <a:solidFill>
-                  <a:srgbClr val="000000"/>
-                </a:solidFill>
-                <a:latin typeface="Calibri Light"/>
-              </a:rPr>
-              <a:t>Образец заголовка</a:t>
-            </a:r>
-            <a:endParaRPr b="0" lang="en-US" sz="4500" spc="-1" strike="noStrike">
-              <a:solidFill>
-                <a:srgbClr val="000000"/>
-              </a:solidFill>
-              <a:latin typeface="Calibri"/>
+            <a:ext cx="6857280" cy="1789920"/>
+          </a:xfrm>
+          <a:prstGeom prst="rect">
+            <a:avLst/>
+          </a:prstGeom>
+          <a:noFill/>
+          <a:ln w="0">
+            <a:noFill/>
+          </a:ln>
+        </p:spPr>
+        <p:txBody>
+          <a:bodyPr lIns="0" rIns="0" tIns="0" bIns="0" anchor="ctr">
+            <a:noAutofit/>
+          </a:bodyPr>
+          <a:p>
+            <a:r>
+              <a:rPr b="0" lang="en-US" sz="1800" spc="-1" strike="noStrike">
+                <a:latin typeface="Arial"/>
+              </a:rPr>
+              <a:t>Click to edit the title text format</a:t>
+            </a:r>
+            <a:endParaRPr b="0" lang="en-US" sz="1800" spc="-1" strike="noStrike">
+              <a:latin typeface="Arial"/>
             </a:endParaRPr>
           </a:p>
         </p:txBody>
@@ -3621,57 +3192,51 @@
             <a:spLocks noGrp="1"/>
           </p:cNvSpPr>
           <p:nvPr>
-            <p:ph type="dt" idx="1"/>
+            <p:ph type="ftr" idx="1"/>
           </p:nvPr>
         </p:nvSpPr>
         <p:spPr>
           <a:xfrm>
-            <a:off x="628560" y="4767120"/>
-            <a:ext cx="2057040" cy="273600"/>
-          </a:xfrm>
-          <a:prstGeom prst="rect">
-            <a:avLst/>
-          </a:prstGeom>
-          <a:noFill/>
-          <a:ln w="0">
-            <a:noFill/>
-          </a:ln>
-        </p:spPr>
-        <p:txBody>
-          <a:bodyPr anchor="ctr">
+            <a:off x="3029040" y="4767120"/>
+            <a:ext cx="3085560" cy="273240"/>
+          </a:xfrm>
+          <a:prstGeom prst="rect">
+            <a:avLst/>
+          </a:prstGeom>
+          <a:noFill/>
+          <a:ln w="0">
+            <a:noFill/>
+          </a:ln>
+        </p:spPr>
+        <p:txBody>
+          <a:bodyPr lIns="90000" rIns="90000" tIns="45000" bIns="45000" anchor="ctr">
             <a:noAutofit/>
           </a:bodyPr>
           <a:lstStyle>
-            <a:lvl1pPr>
+            <a:lvl1pPr algn="ctr">
               <a:lnSpc>
                 <a:spcPct val="100000"/>
               </a:lnSpc>
               <a:buNone/>
-              <a:defRPr b="0" lang="en-US" sz="900" spc="-1" strike="noStrike">
-                <a:solidFill>
-                  <a:srgbClr val="8b8b8b"/>
-                </a:solidFill>
-                <a:latin typeface="Calibri"/>
+              <a:defRPr b="0" lang="en-US" sz="1400" spc="-1" strike="noStrike">
+                <a:latin typeface="Times New Roman"/>
               </a:defRPr>
             </a:lvl1pPr>
           </a:lstStyle>
           <a:p>
-            <a:pPr>
+            <a:pPr algn="ctr">
               <a:lnSpc>
                 <a:spcPct val="100000"/>
               </a:lnSpc>
               <a:buNone/>
             </a:pPr>
             <a:r>
-              <a:rPr b="0" lang="en-US" sz="900" spc="-1" strike="noStrike">
-                <a:solidFill>
-                  <a:srgbClr val="8b8b8b"/>
-                </a:solidFill>
-                <a:latin typeface="Calibri"/>
-              </a:rPr>
-              <a:t> </a:t>
-            </a:r>
-            <a:endParaRPr b="0" lang="en-US" sz="900" spc="-1" strike="noStrike">
+              <a:rPr b="0" lang="en-US" sz="1400" spc="-1" strike="noStrike">
+                <a:latin typeface="Times New Roman"/>
+              </a:rPr>
+              <a:t>&lt;footer&gt;</a:t>
+            </a:r>
+            <a:endParaRPr b="0" lang="en-US" sz="1400" spc="-1" strike="noStrike">
               <a:latin typeface="Times New Roman"/>
             </a:endParaRPr>
           </a:p>
@@ -3684,108 +3249,104 @@
             <a:spLocks noGrp="1"/>
           </p:cNvSpPr>
           <p:nvPr>
-            <p:ph type="ftr" idx="2"/>
+            <p:ph type="sldNum" idx="2"/>
           </p:nvPr>
         </p:nvSpPr>
         <p:spPr>
           <a:xfrm>
-            <a:off x="3029040" y="4767120"/>
-            <a:ext cx="3085920" cy="273600"/>
-          </a:xfrm>
-          <a:prstGeom prst="rect">
-            <a:avLst/>
-          </a:prstGeom>
-          <a:noFill/>
-          <a:ln w="0">
-            <a:noFill/>
-          </a:ln>
-        </p:spPr>
-        <p:txBody>
-          <a:bodyPr anchor="ctr">
+            <a:off x="6458040" y="4767120"/>
+            <a:ext cx="2056680" cy="273240"/>
+          </a:xfrm>
+          <a:prstGeom prst="rect">
+            <a:avLst/>
+          </a:prstGeom>
+          <a:noFill/>
+          <a:ln w="0">
+            <a:noFill/>
+          </a:ln>
+        </p:spPr>
+        <p:txBody>
+          <a:bodyPr lIns="90000" rIns="90000" tIns="45000" bIns="45000" anchor="ctr">
             <a:noAutofit/>
           </a:bodyPr>
           <a:lstStyle>
-            <a:lvl1pPr algn="ctr">
-              <a:buNone/>
+            <a:lvl1pPr algn="r">
+              <a:lnSpc>
+                <a:spcPct val="100000"/>
+              </a:lnSpc>
+              <a:buNone/>
+              <a:defRPr b="0" lang="en-US" sz="900" spc="-1" strike="noStrike">
+                <a:solidFill>
+                  <a:srgbClr val="8b8b8b"/>
+                </a:solidFill>
+                <a:latin typeface="Calibri"/>
+              </a:defRPr>
+            </a:lvl1pPr>
+          </a:lstStyle>
+          <a:p>
+            <a:pPr algn="r">
+              <a:lnSpc>
+                <a:spcPct val="100000"/>
+              </a:lnSpc>
+              <a:buNone/>
+            </a:pPr>
+            <a:fld id="{DCD8B8B9-5519-4C58-8356-67A42C7E0167}" type="slidenum">
+              <a:rPr b="0" lang="en-US" sz="900" spc="-1" strike="noStrike">
+                <a:solidFill>
+                  <a:srgbClr val="8b8b8b"/>
+                </a:solidFill>
+                <a:latin typeface="Calibri"/>
+              </a:rPr>
+              <a:t>&lt;number&gt;</a:t>
+            </a:fld>
+            <a:endParaRPr b="0" lang="en-US" sz="900" spc="-1" strike="noStrike">
+              <a:latin typeface="Times New Roman"/>
+            </a:endParaRPr>
+          </a:p>
+        </p:txBody>
+      </p:sp>
+      <p:sp>
+        <p:nvSpPr>
+          <p:cNvPr id="3" name="PlaceHolder 4"/>
+          <p:cNvSpPr>
+            <a:spLocks noGrp="1"/>
+          </p:cNvSpPr>
+          <p:nvPr>
+            <p:ph type="dt" idx="3"/>
+          </p:nvPr>
+        </p:nvSpPr>
+        <p:spPr>
+          <a:xfrm>
+            <a:off x="628560" y="4767120"/>
+            <a:ext cx="2056680" cy="273240"/>
+          </a:xfrm>
+          <a:prstGeom prst="rect">
+            <a:avLst/>
+          </a:prstGeom>
+          <a:noFill/>
+          <a:ln w="0">
+            <a:noFill/>
+          </a:ln>
+        </p:spPr>
+        <p:txBody>
+          <a:bodyPr lIns="90000" rIns="90000" tIns="45000" bIns="45000" anchor="ctr">
+            <a:noAutofit/>
+          </a:bodyPr>
+          <a:lstStyle>
+            <a:lvl1pPr>
               <a:defRPr b="0" lang="en-US" sz="1400" spc="-1" strike="noStrike">
                 <a:latin typeface="Times New Roman"/>
               </a:defRPr>
             </a:lvl1pPr>
           </a:lstStyle>
           <a:p>
-            <a:pPr algn="ctr">
-              <a:buNone/>
-            </a:pPr>
             <a:r>
               <a:rPr b="0" lang="en-US" sz="1400" spc="-1" strike="noStrike">
                 <a:latin typeface="Times New Roman"/>
               </a:rPr>
-              <a:t> </a:t>
+              <a:t>&lt;date/time&gt;</a:t>
             </a:r>
             <a:endParaRPr b="0" lang="en-US" sz="1400" spc="-1" strike="noStrike">
-              <a:latin typeface="Times New Roman"/>
-            </a:endParaRPr>
-          </a:p>
-        </p:txBody>
-      </p:sp>
-      <p:sp>
-        <p:nvSpPr>
-          <p:cNvPr id="3" name="PlaceHolder 4"/>
-          <p:cNvSpPr>
-            <a:spLocks noGrp="1"/>
-          </p:cNvSpPr>
-          <p:nvPr>
-            <p:ph type="sldNum" idx="3"/>
-          </p:nvPr>
-        </p:nvSpPr>
-        <p:spPr>
-          <a:xfrm>
-            <a:off x="6458040" y="4767120"/>
-            <a:ext cx="2057040" cy="273600"/>
-          </a:xfrm>
-          <a:prstGeom prst="rect">
-            <a:avLst/>
-          </a:prstGeom>
-          <a:noFill/>
-          <a:ln w="0">
-            <a:noFill/>
-          </a:ln>
-        </p:spPr>
-        <p:txBody>
-          <a:bodyPr anchor="ctr">
-            <a:noAutofit/>
-          </a:bodyPr>
-          <a:lstStyle>
-            <a:lvl1pPr algn="r">
-              <a:lnSpc>
-                <a:spcPct val="100000"/>
-              </a:lnSpc>
-              <a:buNone/>
-              <a:defRPr b="0" lang="en-US" sz="900" spc="-1" strike="noStrike">
-                <a:solidFill>
-                  <a:srgbClr val="8b8b8b"/>
-                </a:solidFill>
-                <a:latin typeface="Calibri"/>
-              </a:defRPr>
-            </a:lvl1pPr>
-          </a:lstStyle>
-          <a:p>
-            <a:pPr algn="r">
-              <a:lnSpc>
-                <a:spcPct val="100000"/>
-              </a:lnSpc>
-              <a:buNone/>
-            </a:pPr>
-            <a:fld id="{592A2BB8-F3FD-414D-A78E-3D097FB56FF5}" type="slidenum">
-              <a:rPr b="0" lang="en-US" sz="900" spc="-1" strike="noStrike">
-                <a:solidFill>
-                  <a:srgbClr val="8b8b8b"/>
-                </a:solidFill>
-                <a:latin typeface="Calibri"/>
-              </a:rPr>
-              <a:t>11</a:t>
-            </a:fld>
-            <a:endParaRPr b="0" lang="en-US" sz="900" spc="-1" strike="noStrike">
               <a:latin typeface="Times New Roman"/>
             </a:endParaRPr>
           </a:p>
@@ -3820,9 +3381,6 @@
           </a:bodyPr>
           <a:p>
             <a:pPr marL="432000" indent="-324000">
-              <a:lnSpc>
-                <a:spcPct val="90000"/>
-              </a:lnSpc>
               <a:spcBef>
                 <a:spcPts val="1417"/>
               </a:spcBef>
@@ -3834,26 +3392,17 @@
               <a:buChar char=""/>
             </a:pPr>
             <a:r>
-              <a:rPr b="0" lang="en-US" sz="2100" spc="-1" strike="noStrike">
-                <a:solidFill>
-                  <a:srgbClr val="000000"/>
-                </a:solidFill>
-                <a:latin typeface="Calibri"/>
+              <a:rPr b="0" lang="en-US" sz="3200" spc="-1" strike="noStrike">
+                <a:latin typeface="Arial"/>
               </a:rPr>
               <a:t>Click to edit the outline text format</a:t>
             </a:r>
-            <a:endParaRPr b="0" lang="en-US" sz="2100" spc="-1" strike="noStrike">
-              <a:solidFill>
-                <a:srgbClr val="000000"/>
-              </a:solidFill>
-              <a:latin typeface="Calibri"/>
+            <a:endParaRPr b="0" lang="en-US" sz="3200" spc="-1" strike="noStrike">
+              <a:latin typeface="Arial"/>
             </a:endParaRPr>
           </a:p>
           <a:p>
             <a:pPr lvl="1" marL="864000" indent="-324000">
-              <a:lnSpc>
-                <a:spcPct val="90000"/>
-              </a:lnSpc>
               <a:spcBef>
                 <a:spcPts val="1134"/>
               </a:spcBef>
@@ -3865,26 +3414,17 @@
               <a:buChar char=""/>
             </a:pPr>
             <a:r>
-              <a:rPr b="0" lang="en-US" sz="1500" spc="-1" strike="noStrike">
-                <a:solidFill>
-                  <a:srgbClr val="000000"/>
-                </a:solidFill>
-                <a:latin typeface="Calibri"/>
+              <a:rPr b="0" lang="en-US" sz="2800" spc="-1" strike="noStrike">
+                <a:latin typeface="Arial"/>
               </a:rPr>
               <a:t>Second Outline Level</a:t>
             </a:r>
-            <a:endParaRPr b="0" lang="en-US" sz="1500" spc="-1" strike="noStrike">
-              <a:solidFill>
-                <a:srgbClr val="000000"/>
-              </a:solidFill>
-              <a:latin typeface="Calibri"/>
+            <a:endParaRPr b="0" lang="en-US" sz="2800" spc="-1" strike="noStrike">
+              <a:latin typeface="Arial"/>
             </a:endParaRPr>
           </a:p>
           <a:p>
             <a:pPr lvl="2" marL="1296000" indent="-288000">
-              <a:lnSpc>
-                <a:spcPct val="90000"/>
-              </a:lnSpc>
               <a:spcBef>
                 <a:spcPts val="850"/>
               </a:spcBef>
@@ -3896,26 +3436,17 @@
               <a:buChar char=""/>
             </a:pPr>
             <a:r>
-              <a:rPr b="0" lang="en-US" sz="1350" spc="-1" strike="noStrike">
-                <a:solidFill>
-                  <a:srgbClr val="000000"/>
-                </a:solidFill>
-                <a:latin typeface="Calibri"/>
+              <a:rPr b="0" lang="en-US" sz="2400" spc="-1" strike="noStrike">
+                <a:latin typeface="Arial"/>
               </a:rPr>
               <a:t>Third Outline Level</a:t>
             </a:r>
-            <a:endParaRPr b="0" lang="en-US" sz="1350" spc="-1" strike="noStrike">
-              <a:solidFill>
-                <a:srgbClr val="000000"/>
-              </a:solidFill>
-              <a:latin typeface="Calibri"/>
+            <a:endParaRPr b="0" lang="en-US" sz="2400" spc="-1" strike="noStrike">
+              <a:latin typeface="Arial"/>
             </a:endParaRPr>
           </a:p>
           <a:p>
             <a:pPr lvl="3" marL="1728000" indent="-216000">
-              <a:lnSpc>
-                <a:spcPct val="90000"/>
-              </a:lnSpc>
               <a:spcBef>
                 <a:spcPts val="567"/>
               </a:spcBef>
@@ -3927,26 +3458,17 @@
               <a:buChar char=""/>
             </a:pPr>
             <a:r>
-              <a:rPr b="0" lang="en-US" sz="1350" spc="-1" strike="noStrike">
-                <a:solidFill>
-                  <a:srgbClr val="000000"/>
-                </a:solidFill>
-                <a:latin typeface="Calibri"/>
+              <a:rPr b="0" lang="en-US" sz="2000" spc="-1" strike="noStrike">
+                <a:latin typeface="Arial"/>
               </a:rPr>
               <a:t>Fourth Outline Level</a:t>
             </a:r>
-            <a:endParaRPr b="0" lang="en-US" sz="1350" spc="-1" strike="noStrike">
-              <a:solidFill>
-                <a:srgbClr val="000000"/>
-              </a:solidFill>
-              <a:latin typeface="Calibri"/>
+            <a:endParaRPr b="0" lang="en-US" sz="2000" spc="-1" strike="noStrike">
+              <a:latin typeface="Arial"/>
             </a:endParaRPr>
           </a:p>
           <a:p>
             <a:pPr lvl="4" marL="2160000" indent="-216000">
-              <a:lnSpc>
-                <a:spcPct val="90000"/>
-              </a:lnSpc>
               <a:spcBef>
                 <a:spcPts val="283"/>
               </a:spcBef>
@@ -3959,25 +3481,16 @@
             </a:pPr>
             <a:r>
               <a:rPr b="0" lang="en-US" sz="2000" spc="-1" strike="noStrike">
-                <a:solidFill>
-                  <a:srgbClr val="000000"/>
-                </a:solidFill>
-                <a:latin typeface="Calibri"/>
+                <a:latin typeface="Arial"/>
               </a:rPr>
               <a:t>Fifth Outline Level</a:t>
             </a:r>
             <a:endParaRPr b="0" lang="en-US" sz="2000" spc="-1" strike="noStrike">
-              <a:solidFill>
-                <a:srgbClr val="000000"/>
-              </a:solidFill>
-              <a:latin typeface="Calibri"/>
+              <a:latin typeface="Arial"/>
             </a:endParaRPr>
           </a:p>
           <a:p>
             <a:pPr lvl="5" marL="2592000" indent="-216000">
-              <a:lnSpc>
-                <a:spcPct val="90000"/>
-              </a:lnSpc>
               <a:spcBef>
                 <a:spcPts val="283"/>
               </a:spcBef>
@@ -3990,25 +3503,16 @@
             </a:pPr>
             <a:r>
               <a:rPr b="0" lang="en-US" sz="2000" spc="-1" strike="noStrike">
-                <a:solidFill>
-                  <a:srgbClr val="000000"/>
-                </a:solidFill>
-                <a:latin typeface="Calibri"/>
+                <a:latin typeface="Arial"/>
               </a:rPr>
               <a:t>Sixth Outline Level</a:t>
             </a:r>
             <a:endParaRPr b="0" lang="en-US" sz="2000" spc="-1" strike="noStrike">
-              <a:solidFill>
-                <a:srgbClr val="000000"/>
-              </a:solidFill>
-              <a:latin typeface="Calibri"/>
+              <a:latin typeface="Arial"/>
             </a:endParaRPr>
           </a:p>
           <a:p>
             <a:pPr lvl="6" marL="3024000" indent="-216000">
-              <a:lnSpc>
-                <a:spcPct val="90000"/>
-              </a:lnSpc>
               <a:spcBef>
                 <a:spcPts val="283"/>
               </a:spcBef>
@@ -4021,18 +3525,12 @@
             </a:pPr>
             <a:r>
               <a:rPr b="0" lang="en-US" sz="2000" spc="-1" strike="noStrike">
-                <a:solidFill>
-                  <a:srgbClr val="000000"/>
-                </a:solidFill>
-                <a:latin typeface="Calibri"/>
+                <a:latin typeface="Arial"/>
               </a:rPr>
               <a:t>Seventh Outline Level</a:t>
             </a:r>
             <a:endParaRPr b="0" lang="en-US" sz="2000" spc="-1" strike="noStrike">
-              <a:solidFill>
-                <a:srgbClr val="000000"/>
-              </a:solidFill>
-              <a:latin typeface="Calibri"/>
+              <a:latin typeface="Arial"/>
             </a:endParaRPr>
           </a:p>
         </p:txBody>
@@ -4083,7 +3581,7 @@
         <p:spPr>
           <a:xfrm>
             <a:off x="186840" y="178200"/>
-            <a:ext cx="8770320" cy="4758120"/>
+            <a:ext cx="8769960" cy="4757760"/>
           </a:xfrm>
           <a:prstGeom prst="roundRect">
             <a:avLst>
@@ -4121,7 +3619,7 @@
         <p:spPr>
           <a:xfrm>
             <a:off x="460080" y="4445640"/>
-            <a:ext cx="2999160" cy="269640"/>
+            <a:ext cx="2998800" cy="269280"/>
           </a:xfrm>
           <a:prstGeom prst="rect">
             <a:avLst/>
@@ -4154,6 +3652,7 @@
                   <a:srgbClr val="f2f2f2"/>
                 </a:solidFill>
                 <a:latin typeface="Arial"/>
+                <a:ea typeface="DejaVu Sans"/>
               </a:rPr>
               <a:t>Презентация создана в </a:t>
             </a:r>
@@ -4163,6 +3662,7 @@
                   <a:srgbClr val="f2f2f2"/>
                 </a:solidFill>
                 <a:latin typeface="Arial"/>
+                <a:ea typeface="DejaVu Sans"/>
               </a:rPr>
               <a:t>Fibonacci</a:t>
             </a:r>
@@ -4185,7 +3685,7 @@
         <p:spPr>
           <a:xfrm>
             <a:off x="2423160" y="4446360"/>
-            <a:ext cx="291240" cy="291240"/>
+            <a:ext cx="290880" cy="290880"/>
           </a:xfrm>
           <a:prstGeom prst="rect">
             <a:avLst/>
@@ -4204,7 +3704,7 @@
         <p:spPr>
           <a:xfrm>
             <a:off x="460080" y="622080"/>
-            <a:ext cx="6926040" cy="3306960"/>
+            <a:ext cx="6925680" cy="3306600"/>
           </a:xfrm>
           <a:prstGeom prst="rect">
             <a:avLst/>
@@ -4260,7 +3760,7 @@
         <p:spPr>
           <a:xfrm>
             <a:off x="5753880" y="2557440"/>
-            <a:ext cx="4010040" cy="3133440"/>
+            <a:ext cx="4009680" cy="3133080"/>
           </a:xfrm>
           <a:prstGeom prst="rect">
             <a:avLst/>
@@ -4309,7 +3809,7 @@
         <p:spPr>
           <a:xfrm>
             <a:off x="0" y="-478800"/>
-            <a:ext cx="9143640" cy="1766160"/>
+            <a:ext cx="9143280" cy="1765800"/>
           </a:xfrm>
           <a:prstGeom prst="roundRect">
             <a:avLst>
@@ -4347,7 +3847,7 @@
         <p:spPr>
           <a:xfrm>
             <a:off x="384840" y="1726200"/>
-            <a:ext cx="2665080" cy="713880"/>
+            <a:ext cx="2664720" cy="713520"/>
           </a:xfrm>
           <a:prstGeom prst="rect">
             <a:avLst/>
@@ -4399,7 +3899,7 @@
         <p:spPr>
           <a:xfrm>
             <a:off x="384840" y="2611080"/>
-            <a:ext cx="2665080" cy="1565280"/>
+            <a:ext cx="2664720" cy="1564920"/>
           </a:xfrm>
           <a:prstGeom prst="rect">
             <a:avLst/>
@@ -4461,7 +3961,7 @@
         <p:spPr>
           <a:xfrm>
             <a:off x="3239280" y="1726200"/>
-            <a:ext cx="2665080" cy="713880"/>
+            <a:ext cx="2664720" cy="713520"/>
           </a:xfrm>
           <a:prstGeom prst="rect">
             <a:avLst/>
@@ -4513,7 +4013,7 @@
         <p:spPr>
           <a:xfrm>
             <a:off x="3239280" y="2611080"/>
-            <a:ext cx="2665080" cy="1565280"/>
+            <a:ext cx="2664720" cy="1564920"/>
           </a:xfrm>
           <a:prstGeom prst="rect">
             <a:avLst/>
@@ -4575,7 +4075,7 @@
         <p:spPr>
           <a:xfrm>
             <a:off x="6093720" y="1726200"/>
-            <a:ext cx="2665080" cy="713880"/>
+            <a:ext cx="2664720" cy="713520"/>
           </a:xfrm>
           <a:prstGeom prst="rect">
             <a:avLst/>
@@ -4627,7 +4127,7 @@
         <p:spPr>
           <a:xfrm>
             <a:off x="6093720" y="2611080"/>
-            <a:ext cx="2665080" cy="1565280"/>
+            <a:ext cx="2664720" cy="1564920"/>
           </a:xfrm>
           <a:prstGeom prst="rect">
             <a:avLst/>
@@ -4788,7 +4288,7 @@
         <p:spPr>
           <a:xfrm>
             <a:off x="8519760" y="4831560"/>
-            <a:ext cx="484920" cy="226800"/>
+            <a:ext cx="484560" cy="226800"/>
           </a:xfrm>
           <a:prstGeom prst="rect">
             <a:avLst/>
@@ -4834,27 +4334,39 @@
       <p:sp>
         <p:nvSpPr>
           <p:cNvPr id="160" name=""/>
-          <p:cNvSpPr txBox="1"/>
+          <p:cNvSpPr/>
           <p:nvPr/>
         </p:nvSpPr>
         <p:spPr>
           <a:xfrm>
             <a:off x="313200" y="156600"/>
-            <a:ext cx="8458200" cy="757800"/>
-          </a:xfrm>
-          <a:prstGeom prst="rect">
-            <a:avLst/>
-          </a:prstGeom>
-          <a:noFill/>
-          <a:ln w="0">
-            <a:noFill/>
-          </a:ln>
-        </p:spPr>
+            <a:ext cx="8457840" cy="757440"/>
+          </a:xfrm>
+          <a:prstGeom prst="rect">
+            <a:avLst/>
+          </a:prstGeom>
+          <a:noFill/>
+          <a:ln w="0">
+            <a:noFill/>
+          </a:ln>
+        </p:spPr>
+        <p:style>
+          <a:lnRef idx="0"/>
+          <a:fillRef idx="0"/>
+          <a:effectRef idx="0"/>
+          <a:fontRef idx="minor"/>
+        </p:style>
         <p:txBody>
           <a:bodyPr lIns="90000" rIns="90000" tIns="45000" bIns="45000" anchor="t">
             <a:noAutofit/>
           </a:bodyPr>
           <a:p>
+            <a:pPr>
+              <a:lnSpc>
+                <a:spcPct val="100000"/>
+              </a:lnSpc>
+              <a:buNone/>
+            </a:pPr>
             <a:r>
               <a:rPr b="0" lang="en-US" sz="1800" spc="-1" strike="noStrike">
                 <a:latin typeface="Arial"/>
@@ -4906,7 +4418,7 @@
         <p:spPr>
           <a:xfrm>
             <a:off x="384840" y="3271680"/>
-            <a:ext cx="5236560" cy="1321200"/>
+            <a:ext cx="5236200" cy="1320840"/>
           </a:xfrm>
           <a:prstGeom prst="roundRect">
             <a:avLst>
@@ -4944,7 +4456,7 @@
         <p:spPr>
           <a:xfrm>
             <a:off x="3091680" y="1028880"/>
-            <a:ext cx="2533320" cy="2057040"/>
+            <a:ext cx="2532960" cy="2056680"/>
           </a:xfrm>
           <a:prstGeom prst="roundRect">
             <a:avLst>
@@ -4982,7 +4494,7 @@
         <p:spPr>
           <a:xfrm>
             <a:off x="387720" y="1014480"/>
-            <a:ext cx="2533320" cy="2057040"/>
+            <a:ext cx="2532960" cy="2056680"/>
           </a:xfrm>
           <a:prstGeom prst="roundRect">
             <a:avLst>
@@ -5020,7 +4532,7 @@
         <p:spPr>
           <a:xfrm>
             <a:off x="479880" y="1059120"/>
-            <a:ext cx="2343600" cy="713880"/>
+            <a:ext cx="2343240" cy="713520"/>
           </a:xfrm>
           <a:prstGeom prst="rect">
             <a:avLst/>
@@ -5082,7 +4594,7 @@
         <p:spPr>
           <a:xfrm>
             <a:off x="479880" y="1843560"/>
-            <a:ext cx="2343600" cy="1142280"/>
+            <a:ext cx="2343240" cy="1141920"/>
           </a:xfrm>
           <a:prstGeom prst="rect">
             <a:avLst/>
@@ -5144,7 +4656,7 @@
         <p:spPr>
           <a:xfrm>
             <a:off x="3183120" y="1059120"/>
-            <a:ext cx="2340360" cy="713880"/>
+            <a:ext cx="2340000" cy="713520"/>
           </a:xfrm>
           <a:prstGeom prst="rect">
             <a:avLst/>
@@ -5196,7 +4708,7 @@
         <p:spPr>
           <a:xfrm>
             <a:off x="3183120" y="1843560"/>
-            <a:ext cx="2340360" cy="1142280"/>
+            <a:ext cx="2340000" cy="1141920"/>
           </a:xfrm>
           <a:prstGeom prst="rect">
             <a:avLst/>
@@ -5258,7 +4770,7 @@
         <p:spPr>
           <a:xfrm>
             <a:off x="479520" y="3362040"/>
-            <a:ext cx="5236560" cy="329040"/>
+            <a:ext cx="5236200" cy="328680"/>
           </a:xfrm>
           <a:prstGeom prst="rect">
             <a:avLst/>
@@ -5310,7 +4822,7 @@
         <p:spPr>
           <a:xfrm>
             <a:off x="479520" y="3713400"/>
-            <a:ext cx="5146920" cy="713880"/>
+            <a:ext cx="5146560" cy="713520"/>
           </a:xfrm>
           <a:prstGeom prst="rect">
             <a:avLst/>
@@ -5372,7 +4884,7 @@
         <p:spPr>
           <a:xfrm>
             <a:off x="5808240" y="1028880"/>
-            <a:ext cx="3128400" cy="3564360"/>
+            <a:ext cx="3128040" cy="3564000"/>
           </a:xfrm>
           <a:prstGeom prst="roundRect">
             <a:avLst>
@@ -5436,7 +4948,7 @@
         <p:spPr>
           <a:xfrm>
             <a:off x="8519760" y="4831560"/>
-            <a:ext cx="484920" cy="226800"/>
+            <a:ext cx="484560" cy="226800"/>
           </a:xfrm>
           <a:prstGeom prst="rect">
             <a:avLst/>
@@ -5482,27 +4994,39 @@
       <p:sp>
         <p:nvSpPr>
           <p:cNvPr id="172" name=""/>
-          <p:cNvSpPr txBox="1"/>
+          <p:cNvSpPr/>
           <p:nvPr/>
         </p:nvSpPr>
         <p:spPr>
           <a:xfrm>
             <a:off x="401400" y="239760"/>
-            <a:ext cx="8458200" cy="819360"/>
-          </a:xfrm>
-          <a:prstGeom prst="rect">
-            <a:avLst/>
-          </a:prstGeom>
-          <a:noFill/>
-          <a:ln w="0">
-            <a:noFill/>
-          </a:ln>
-        </p:spPr>
+            <a:ext cx="8457840" cy="819000"/>
+          </a:xfrm>
+          <a:prstGeom prst="rect">
+            <a:avLst/>
+          </a:prstGeom>
+          <a:noFill/>
+          <a:ln w="0">
+            <a:noFill/>
+          </a:ln>
+        </p:spPr>
+        <p:style>
+          <a:lnRef idx="0"/>
+          <a:fillRef idx="0"/>
+          <a:effectRef idx="0"/>
+          <a:fontRef idx="minor"/>
+        </p:style>
         <p:txBody>
           <a:bodyPr lIns="90000" rIns="90000" tIns="45000" bIns="45000" anchor="t">
             <a:noAutofit/>
           </a:bodyPr>
           <a:p>
+            <a:pPr>
+              <a:lnSpc>
+                <a:spcPct val="100000"/>
+              </a:lnSpc>
+              <a:buNone/>
+            </a:pPr>
             <a:r>
               <a:rPr b="0" lang="en-US" sz="1800" spc="-1" strike="noStrike">
                 <a:latin typeface="Arial"/>
@@ -5554,7 +5078,7 @@
         <p:spPr>
           <a:xfrm>
             <a:off x="186840" y="178200"/>
-            <a:ext cx="8770320" cy="4758120"/>
+            <a:ext cx="8769960" cy="4757760"/>
           </a:xfrm>
           <a:prstGeom prst="roundRect">
             <a:avLst>
@@ -5592,7 +5116,7 @@
         <p:spPr>
           <a:xfrm>
             <a:off x="1640880" y="4489920"/>
-            <a:ext cx="2999160" cy="269640"/>
+            <a:ext cx="2998800" cy="269280"/>
           </a:xfrm>
           <a:prstGeom prst="rect">
             <a:avLst/>
@@ -5625,6 +5149,7 @@
                   <a:srgbClr val="f2f2f2"/>
                 </a:solidFill>
                 <a:latin typeface="Arial"/>
+                <a:ea typeface="DejaVu Sans"/>
               </a:rPr>
               <a:t>Презентация создана в </a:t>
             </a:r>
@@ -5634,6 +5159,7 @@
                   <a:srgbClr val="f2f2f2"/>
                 </a:solidFill>
                 <a:latin typeface="Arial"/>
+                <a:ea typeface="DejaVu Sans"/>
               </a:rPr>
               <a:t>Fibonacci</a:t>
             </a:r>
@@ -5652,7 +5178,7 @@
         <p:spPr>
           <a:xfrm>
             <a:off x="867240" y="3488040"/>
-            <a:ext cx="257040" cy="257040"/>
+            <a:ext cx="256680" cy="256680"/>
           </a:xfrm>
           <a:prstGeom prst="ellipse">
             <a:avLst/>
@@ -5687,7 +5213,7 @@
         <p:spPr>
           <a:xfrm>
             <a:off x="351000" y="3691440"/>
-            <a:ext cx="1289520" cy="1133640"/>
+            <a:ext cx="1289160" cy="1133280"/>
           </a:xfrm>
           <a:prstGeom prst="rect">
             <a:avLst/>
@@ -5706,7 +5232,7 @@
         <p:spPr>
           <a:xfrm>
             <a:off x="460080" y="622080"/>
-            <a:ext cx="6926040" cy="3306960"/>
+            <a:ext cx="6925680" cy="3306600"/>
           </a:xfrm>
           <a:prstGeom prst="rect">
             <a:avLst/>
@@ -5762,7 +5288,7 @@
         <p:spPr>
           <a:xfrm>
             <a:off x="5753880" y="2557440"/>
-            <a:ext cx="4010040" cy="3133440"/>
+            <a:ext cx="4009680" cy="3133080"/>
           </a:xfrm>
           <a:prstGeom prst="rect">
             <a:avLst/>
@@ -5815,7 +5341,7 @@
         <p:spPr>
           <a:xfrm>
             <a:off x="5753880" y="2557440"/>
-            <a:ext cx="4010040" cy="3133440"/>
+            <a:ext cx="4009680" cy="3133080"/>
           </a:xfrm>
           <a:prstGeom prst="rect">
             <a:avLst/>
@@ -5834,7 +5360,7 @@
         <p:spPr>
           <a:xfrm>
             <a:off x="185760" y="831240"/>
-            <a:ext cx="899640" cy="899640"/>
+            <a:ext cx="899280" cy="899280"/>
           </a:xfrm>
           <a:prstGeom prst="ellipse">
             <a:avLst/>
@@ -5875,6 +5401,7 @@
                   <a:srgbClr val="142111"/>
                 </a:solidFill>
                 <a:latin typeface="Calibri"/>
+                <a:ea typeface="DejaVu Sans"/>
               </a:rPr>
               <a:t>01</a:t>
             </a:r>
@@ -5893,7 +5420,7 @@
         <p:spPr>
           <a:xfrm>
             <a:off x="185760" y="2381400"/>
-            <a:ext cx="899640" cy="887760"/>
+            <a:ext cx="899280" cy="887400"/>
           </a:xfrm>
           <a:prstGeom prst="ellipse">
             <a:avLst/>
@@ -5934,6 +5461,7 @@
                   <a:srgbClr val="142111"/>
                 </a:solidFill>
                 <a:latin typeface="Calibri"/>
+                <a:ea typeface="DejaVu Sans"/>
               </a:rPr>
               <a:t>02</a:t>
             </a:r>
@@ -5952,7 +5480,7 @@
         <p:spPr>
           <a:xfrm>
             <a:off x="185760" y="3860640"/>
-            <a:ext cx="899640" cy="899640"/>
+            <a:ext cx="899280" cy="899280"/>
           </a:xfrm>
           <a:prstGeom prst="ellipse">
             <a:avLst/>
@@ -5993,6 +5521,7 @@
                   <a:srgbClr val="142111"/>
                 </a:solidFill>
                 <a:latin typeface="Calibri"/>
+                <a:ea typeface="DejaVu Sans"/>
               </a:rPr>
               <a:t>03</a:t>
             </a:r>
@@ -6011,7 +5540,7 @@
         <p:spPr>
           <a:xfrm>
             <a:off x="967680" y="797040"/>
-            <a:ext cx="3764880" cy="550800"/>
+            <a:ext cx="3764520" cy="550440"/>
           </a:xfrm>
           <a:prstGeom prst="rect">
             <a:avLst/>
@@ -6073,7 +5602,7 @@
         <p:spPr>
           <a:xfrm>
             <a:off x="967680" y="1332720"/>
-            <a:ext cx="3764880" cy="789840"/>
+            <a:ext cx="3764520" cy="789480"/>
           </a:xfrm>
           <a:prstGeom prst="rect">
             <a:avLst/>
@@ -6135,7 +5664,7 @@
         <p:spPr>
           <a:xfrm>
             <a:off x="964080" y="2292480"/>
-            <a:ext cx="3764880" cy="550800"/>
+            <a:ext cx="3764520" cy="550440"/>
           </a:xfrm>
           <a:prstGeom prst="rect">
             <a:avLst/>
@@ -6187,7 +5716,7 @@
         <p:spPr>
           <a:xfrm>
             <a:off x="964080" y="2825280"/>
-            <a:ext cx="3764880" cy="843480"/>
+            <a:ext cx="3764520" cy="843120"/>
           </a:xfrm>
           <a:prstGeom prst="rect">
             <a:avLst/>
@@ -6249,7 +5778,7 @@
         <p:spPr>
           <a:xfrm>
             <a:off x="964080" y="3777840"/>
-            <a:ext cx="3764880" cy="550800"/>
+            <a:ext cx="3764520" cy="550440"/>
           </a:xfrm>
           <a:prstGeom prst="rect">
             <a:avLst/>
@@ -6301,7 +5830,7 @@
         <p:spPr>
           <a:xfrm>
             <a:off x="964080" y="4310640"/>
-            <a:ext cx="3764880" cy="794880"/>
+            <a:ext cx="3764520" cy="794520"/>
           </a:xfrm>
           <a:prstGeom prst="rect">
             <a:avLst/>
@@ -6363,7 +5892,7 @@
         <p:spPr>
           <a:xfrm>
             <a:off x="5084640" y="987840"/>
-            <a:ext cx="3687840" cy="3497040"/>
+            <a:ext cx="3687480" cy="3496680"/>
           </a:xfrm>
           <a:prstGeom prst="roundRect">
             <a:avLst>
@@ -6427,7 +5956,7 @@
         <p:spPr>
           <a:xfrm>
             <a:off x="8519760" y="4831560"/>
-            <a:ext cx="484920" cy="226800"/>
+            <a:ext cx="484560" cy="226800"/>
           </a:xfrm>
           <a:prstGeom prst="rect">
             <a:avLst/>
@@ -6473,27 +6002,39 @@
       <p:sp>
         <p:nvSpPr>
           <p:cNvPr id="64" name=""/>
-          <p:cNvSpPr txBox="1"/>
+          <p:cNvSpPr/>
           <p:nvPr/>
         </p:nvSpPr>
         <p:spPr>
           <a:xfrm>
             <a:off x="421200" y="228600"/>
-            <a:ext cx="8458200" cy="685800"/>
-          </a:xfrm>
-          <a:prstGeom prst="rect">
-            <a:avLst/>
-          </a:prstGeom>
-          <a:noFill/>
-          <a:ln w="0">
-            <a:noFill/>
-          </a:ln>
-        </p:spPr>
+            <a:ext cx="8457840" cy="685440"/>
+          </a:xfrm>
+          <a:prstGeom prst="rect">
+            <a:avLst/>
+          </a:prstGeom>
+          <a:noFill/>
+          <a:ln w="0">
+            <a:noFill/>
+          </a:ln>
+        </p:spPr>
+        <p:style>
+          <a:lnRef idx="0"/>
+          <a:fillRef idx="0"/>
+          <a:effectRef idx="0"/>
+          <a:fontRef idx="minor"/>
+        </p:style>
         <p:txBody>
           <a:bodyPr lIns="90000" rIns="90000" tIns="45000" bIns="45000" anchor="t">
             <a:noAutofit/>
           </a:bodyPr>
           <a:p>
+            <a:pPr>
+              <a:lnSpc>
+                <a:spcPct val="100000"/>
+              </a:lnSpc>
+              <a:buNone/>
+            </a:pPr>
             <a:r>
               <a:rPr b="0" lang="en-US" sz="1800" spc="-1" strike="noStrike">
                 <a:latin typeface="Arial"/>
@@ -6545,7 +6086,7 @@
         <p:spPr>
           <a:xfrm>
             <a:off x="506520" y="1484640"/>
-            <a:ext cx="2557080" cy="2055600"/>
+            <a:ext cx="2556720" cy="2055240"/>
           </a:xfrm>
           <a:prstGeom prst="roundRect">
             <a:avLst>
@@ -6585,7 +6126,7 @@
         <p:spPr>
           <a:xfrm>
             <a:off x="624240" y="1616760"/>
-            <a:ext cx="2289960" cy="729360"/>
+            <a:ext cx="2289600" cy="729000"/>
           </a:xfrm>
           <a:prstGeom prst="rect">
             <a:avLst/>
@@ -6637,7 +6178,7 @@
         <p:spPr>
           <a:xfrm>
             <a:off x="624240" y="2400480"/>
-            <a:ext cx="2289960" cy="1162440"/>
+            <a:ext cx="2289600" cy="1162080"/>
           </a:xfrm>
           <a:prstGeom prst="rect">
             <a:avLst/>
@@ -6699,7 +6240,7 @@
         <p:spPr>
           <a:xfrm>
             <a:off x="3309120" y="2066040"/>
-            <a:ext cx="2557080" cy="2055600"/>
+            <a:ext cx="2556720" cy="2055240"/>
           </a:xfrm>
           <a:prstGeom prst="roundRect">
             <a:avLst>
@@ -6739,7 +6280,7 @@
         <p:spPr>
           <a:xfrm>
             <a:off x="3426840" y="2198160"/>
-            <a:ext cx="2289960" cy="729360"/>
+            <a:ext cx="2289600" cy="729000"/>
           </a:xfrm>
           <a:prstGeom prst="rect">
             <a:avLst/>
@@ -6791,7 +6332,7 @@
         <p:spPr>
           <a:xfrm>
             <a:off x="3426840" y="2981880"/>
-            <a:ext cx="2289960" cy="1162440"/>
+            <a:ext cx="2289600" cy="1162080"/>
           </a:xfrm>
           <a:prstGeom prst="rect">
             <a:avLst/>
@@ -6843,7 +6384,7 @@
         <p:spPr>
           <a:xfrm>
             <a:off x="6111720" y="2659320"/>
-            <a:ext cx="2557080" cy="2055600"/>
+            <a:ext cx="2556720" cy="2055240"/>
           </a:xfrm>
           <a:prstGeom prst="roundRect">
             <a:avLst>
@@ -6883,7 +6424,7 @@
         <p:spPr>
           <a:xfrm>
             <a:off x="6229440" y="2791440"/>
-            <a:ext cx="2289960" cy="729360"/>
+            <a:ext cx="2289600" cy="729000"/>
           </a:xfrm>
           <a:prstGeom prst="rect">
             <a:avLst/>
@@ -6918,7 +6459,7 @@
                 <a:latin typeface="Arial"/>
                 <a:ea typeface="DejaVu Sans"/>
               </a:rPr>
-              <a:t>SUBTITLE2</a:t>
+              <a:t>SUBTITLE3</a:t>
             </a:r>
             <a:endParaRPr b="0" lang="en-US" sz="1400" spc="-1" strike="noStrike">
               <a:latin typeface="Arial"/>
@@ -6935,7 +6476,7 @@
         <p:spPr>
           <a:xfrm>
             <a:off x="6229440" y="3574800"/>
-            <a:ext cx="2289960" cy="1162440"/>
+            <a:ext cx="2289600" cy="1162080"/>
           </a:xfrm>
           <a:prstGeom prst="rect">
             <a:avLst/>
@@ -6970,7 +6511,7 @@
                 <a:latin typeface="Arial"/>
                 <a:ea typeface="DejaVu Sans"/>
               </a:rPr>
-              <a:t>TEXT2</a:t>
+              <a:t>TEXT3</a:t>
             </a:r>
             <a:endParaRPr b="0" lang="en-US" sz="1100" spc="-1" strike="noStrike">
               <a:latin typeface="Arial"/>
@@ -6987,7 +6528,7 @@
         <p:spPr>
           <a:xfrm>
             <a:off x="8519760" y="4831560"/>
-            <a:ext cx="484920" cy="226800"/>
+            <a:ext cx="484560" cy="226800"/>
           </a:xfrm>
           <a:prstGeom prst="rect">
             <a:avLst/>
@@ -7033,27 +6574,39 @@
       <p:sp>
         <p:nvSpPr>
           <p:cNvPr id="75" name=""/>
-          <p:cNvSpPr txBox="1"/>
+          <p:cNvSpPr/>
           <p:nvPr/>
         </p:nvSpPr>
         <p:spPr>
           <a:xfrm>
             <a:off x="457200" y="228600"/>
-            <a:ext cx="8229600" cy="1143000"/>
-          </a:xfrm>
-          <a:prstGeom prst="rect">
-            <a:avLst/>
-          </a:prstGeom>
-          <a:noFill/>
-          <a:ln w="0">
-            <a:noFill/>
-          </a:ln>
-        </p:spPr>
+            <a:ext cx="8229240" cy="1142640"/>
+          </a:xfrm>
+          <a:prstGeom prst="rect">
+            <a:avLst/>
+          </a:prstGeom>
+          <a:noFill/>
+          <a:ln w="0">
+            <a:noFill/>
+          </a:ln>
+        </p:spPr>
+        <p:style>
+          <a:lnRef idx="0"/>
+          <a:fillRef idx="0"/>
+          <a:effectRef idx="0"/>
+          <a:fontRef idx="minor"/>
+        </p:style>
         <p:txBody>
           <a:bodyPr lIns="90000" rIns="90000" tIns="45000" bIns="45000" anchor="t">
             <a:noAutofit/>
           </a:bodyPr>
           <a:p>
+            <a:pPr>
+              <a:lnSpc>
+                <a:spcPct val="100000"/>
+              </a:lnSpc>
+              <a:buNone/>
+            </a:pPr>
             <a:r>
               <a:rPr b="0" lang="en-US" sz="1800" spc="-1" strike="noStrike">
                 <a:latin typeface="Arial"/>
@@ -7105,7 +6658,7 @@
         <p:spPr>
           <a:xfrm>
             <a:off x="3601800" y="3271680"/>
-            <a:ext cx="5236560" cy="1321200"/>
+            <a:ext cx="5236200" cy="1320840"/>
           </a:xfrm>
           <a:prstGeom prst="roundRect">
             <a:avLst>
@@ -7143,7 +6696,7 @@
         <p:spPr>
           <a:xfrm>
             <a:off x="6308640" y="1028880"/>
-            <a:ext cx="2533320" cy="2057040"/>
+            <a:ext cx="2532960" cy="2056680"/>
           </a:xfrm>
           <a:prstGeom prst="roundRect">
             <a:avLst>
@@ -7181,7 +6734,7 @@
         <p:spPr>
           <a:xfrm>
             <a:off x="3604320" y="1014480"/>
-            <a:ext cx="2533320" cy="2057040"/>
+            <a:ext cx="2532960" cy="2056680"/>
           </a:xfrm>
           <a:prstGeom prst="roundRect">
             <a:avLst>
@@ -7219,7 +6772,7 @@
         <p:spPr>
           <a:xfrm>
             <a:off x="3696480" y="1059120"/>
-            <a:ext cx="2343600" cy="713880"/>
+            <a:ext cx="2343240" cy="713520"/>
           </a:xfrm>
           <a:prstGeom prst="rect">
             <a:avLst/>
@@ -7281,7 +6834,7 @@
         <p:spPr>
           <a:xfrm>
             <a:off x="3696480" y="1843560"/>
-            <a:ext cx="2343600" cy="1142280"/>
+            <a:ext cx="2343240" cy="1141920"/>
           </a:xfrm>
           <a:prstGeom prst="rect">
             <a:avLst/>
@@ -7343,7 +6896,7 @@
         <p:spPr>
           <a:xfrm>
             <a:off x="6400080" y="1059120"/>
-            <a:ext cx="2340360" cy="713880"/>
+            <a:ext cx="2340000" cy="713520"/>
           </a:xfrm>
           <a:prstGeom prst="rect">
             <a:avLst/>
@@ -7395,7 +6948,7 @@
         <p:spPr>
           <a:xfrm>
             <a:off x="6400080" y="1843560"/>
-            <a:ext cx="2340360" cy="1142280"/>
+            <a:ext cx="2340000" cy="1141920"/>
           </a:xfrm>
           <a:prstGeom prst="rect">
             <a:avLst/>
@@ -7457,7 +7010,7 @@
         <p:spPr>
           <a:xfrm>
             <a:off x="3696480" y="3362040"/>
-            <a:ext cx="5236560" cy="329040"/>
+            <a:ext cx="5236200" cy="328680"/>
           </a:xfrm>
           <a:prstGeom prst="rect">
             <a:avLst/>
@@ -7509,7 +7062,7 @@
         <p:spPr>
           <a:xfrm>
             <a:off x="3696480" y="3713400"/>
-            <a:ext cx="5146920" cy="713880"/>
+            <a:ext cx="5146560" cy="713520"/>
           </a:xfrm>
           <a:prstGeom prst="rect">
             <a:avLst/>
@@ -7571,7 +7124,7 @@
         <p:spPr>
           <a:xfrm>
             <a:off x="384840" y="1028880"/>
-            <a:ext cx="3002760" cy="3564360"/>
+            <a:ext cx="3002400" cy="3564000"/>
           </a:xfrm>
           <a:prstGeom prst="roundRect">
             <a:avLst>
@@ -7635,7 +7188,7 @@
         <p:spPr>
           <a:xfrm>
             <a:off x="8519760" y="4831560"/>
-            <a:ext cx="484920" cy="226800"/>
+            <a:ext cx="484560" cy="226800"/>
           </a:xfrm>
           <a:prstGeom prst="rect">
             <a:avLst/>
@@ -7681,27 +7234,39 @@
       <p:sp>
         <p:nvSpPr>
           <p:cNvPr id="87" name=""/>
-          <p:cNvSpPr txBox="1"/>
+          <p:cNvSpPr/>
           <p:nvPr/>
         </p:nvSpPr>
         <p:spPr>
           <a:xfrm>
             <a:off x="313200" y="228600"/>
-            <a:ext cx="8458200" cy="685800"/>
-          </a:xfrm>
-          <a:prstGeom prst="rect">
-            <a:avLst/>
-          </a:prstGeom>
-          <a:noFill/>
-          <a:ln w="0">
-            <a:noFill/>
-          </a:ln>
-        </p:spPr>
+            <a:ext cx="8457840" cy="685440"/>
+          </a:xfrm>
+          <a:prstGeom prst="rect">
+            <a:avLst/>
+          </a:prstGeom>
+          <a:noFill/>
+          <a:ln w="0">
+            <a:noFill/>
+          </a:ln>
+        </p:spPr>
+        <p:style>
+          <a:lnRef idx="0"/>
+          <a:fillRef idx="0"/>
+          <a:effectRef idx="0"/>
+          <a:fontRef idx="minor"/>
+        </p:style>
         <p:txBody>
           <a:bodyPr lIns="90000" rIns="90000" tIns="45000" bIns="45000" anchor="t">
             <a:noAutofit/>
           </a:bodyPr>
           <a:p>
+            <a:pPr>
+              <a:lnSpc>
+                <a:spcPct val="100000"/>
+              </a:lnSpc>
+              <a:buNone/>
+            </a:pPr>
             <a:r>
               <a:rPr b="0" lang="en-US" sz="1800" spc="-1" strike="noStrike">
                 <a:latin typeface="Arial"/>
@@ -7757,7 +7322,7 @@
         <p:spPr>
           <a:xfrm>
             <a:off x="-877680" y="2245320"/>
-            <a:ext cx="4613400" cy="3605040"/>
+            <a:ext cx="4613040" cy="3604680"/>
           </a:xfrm>
           <a:prstGeom prst="rect">
             <a:avLst/>
@@ -7776,7 +7341,7 @@
         <p:spPr>
           <a:xfrm>
             <a:off x="4157640" y="631080"/>
-            <a:ext cx="899640" cy="899640"/>
+            <a:ext cx="899280" cy="899280"/>
           </a:xfrm>
           <a:prstGeom prst="ellipse">
             <a:avLst/>
@@ -7819,6 +7384,7 @@
                   <a:srgbClr val="3e443e"/>
                 </a:solidFill>
                 <a:latin typeface="Calibri"/>
+                <a:ea typeface="DejaVu Sans"/>
               </a:rPr>
               <a:t>01</a:t>
             </a:r>
@@ -7837,7 +7403,7 @@
         <p:spPr>
           <a:xfrm>
             <a:off x="4157640" y="2127600"/>
-            <a:ext cx="899640" cy="887760"/>
+            <a:ext cx="899280" cy="887400"/>
           </a:xfrm>
           <a:prstGeom prst="ellipse">
             <a:avLst/>
@@ -7880,6 +7446,7 @@
                   <a:srgbClr val="3e443e"/>
                 </a:solidFill>
                 <a:latin typeface="Calibri"/>
+                <a:ea typeface="DejaVu Sans"/>
               </a:rPr>
               <a:t>02</a:t>
             </a:r>
@@ -7898,7 +7465,7 @@
         <p:spPr>
           <a:xfrm>
             <a:off x="4157640" y="3612240"/>
-            <a:ext cx="899640" cy="899640"/>
+            <a:ext cx="899280" cy="899280"/>
           </a:xfrm>
           <a:prstGeom prst="ellipse">
             <a:avLst/>
@@ -7941,6 +7508,7 @@
                   <a:srgbClr val="3e443e"/>
                 </a:solidFill>
                 <a:latin typeface="Calibri"/>
+                <a:ea typeface="DejaVu Sans"/>
               </a:rPr>
               <a:t>03</a:t>
             </a:r>
@@ -7959,7 +7527,7 @@
         <p:spPr>
           <a:xfrm>
             <a:off x="5146560" y="489600"/>
-            <a:ext cx="3579120" cy="550800"/>
+            <a:ext cx="3578760" cy="550440"/>
           </a:xfrm>
           <a:prstGeom prst="rect">
             <a:avLst/>
@@ -8021,7 +7589,7 @@
         <p:spPr>
           <a:xfrm>
             <a:off x="5146560" y="1025280"/>
-            <a:ext cx="3579120" cy="789840"/>
+            <a:ext cx="3578760" cy="789480"/>
           </a:xfrm>
           <a:prstGeom prst="rect">
             <a:avLst/>
@@ -8083,7 +7651,7 @@
         <p:spPr>
           <a:xfrm>
             <a:off x="5142960" y="1985400"/>
-            <a:ext cx="3579120" cy="550800"/>
+            <a:ext cx="3578760" cy="550440"/>
           </a:xfrm>
           <a:prstGeom prst="rect">
             <a:avLst/>
@@ -8135,7 +7703,7 @@
         <p:spPr>
           <a:xfrm>
             <a:off x="5142960" y="2517840"/>
-            <a:ext cx="3579120" cy="843480"/>
+            <a:ext cx="3578760" cy="843120"/>
           </a:xfrm>
           <a:prstGeom prst="rect">
             <a:avLst/>
@@ -8197,7 +7765,7 @@
         <p:spPr>
           <a:xfrm>
             <a:off x="5142960" y="3470760"/>
-            <a:ext cx="3579120" cy="550800"/>
+            <a:ext cx="3578760" cy="550440"/>
           </a:xfrm>
           <a:prstGeom prst="rect">
             <a:avLst/>
@@ -8249,7 +7817,7 @@
         <p:spPr>
           <a:xfrm>
             <a:off x="5142960" y="4003560"/>
-            <a:ext cx="3579120" cy="794880"/>
+            <a:ext cx="3578760" cy="794520"/>
           </a:xfrm>
           <a:prstGeom prst="rect">
             <a:avLst/>
@@ -8311,7 +7879,7 @@
         <p:spPr>
           <a:xfrm>
             <a:off x="8519760" y="4831560"/>
-            <a:ext cx="484920" cy="226800"/>
+            <a:ext cx="484560" cy="226800"/>
           </a:xfrm>
           <a:prstGeom prst="rect">
             <a:avLst/>
@@ -8357,27 +7925,39 @@
       <p:sp>
         <p:nvSpPr>
           <p:cNvPr id="99" name=""/>
-          <p:cNvSpPr txBox="1"/>
+          <p:cNvSpPr/>
           <p:nvPr/>
         </p:nvSpPr>
         <p:spPr>
           <a:xfrm>
             <a:off x="264600" y="228600"/>
-            <a:ext cx="3657600" cy="2016720"/>
-          </a:xfrm>
-          <a:prstGeom prst="rect">
-            <a:avLst/>
-          </a:prstGeom>
-          <a:noFill/>
-          <a:ln w="0">
-            <a:noFill/>
-          </a:ln>
-        </p:spPr>
+            <a:ext cx="3657240" cy="2016360"/>
+          </a:xfrm>
+          <a:prstGeom prst="rect">
+            <a:avLst/>
+          </a:prstGeom>
+          <a:noFill/>
+          <a:ln w="0">
+            <a:noFill/>
+          </a:ln>
+        </p:spPr>
+        <p:style>
+          <a:lnRef idx="0"/>
+          <a:fillRef idx="0"/>
+          <a:effectRef idx="0"/>
+          <a:fontRef idx="minor"/>
+        </p:style>
         <p:txBody>
           <a:bodyPr lIns="90000" rIns="90000" tIns="45000" bIns="45000" anchor="t">
             <a:noAutofit/>
           </a:bodyPr>
           <a:p>
+            <a:pPr>
+              <a:lnSpc>
+                <a:spcPct val="100000"/>
+              </a:lnSpc>
+              <a:buNone/>
+            </a:pPr>
             <a:r>
               <a:rPr b="0" lang="en-US" sz="1800" spc="-1" strike="noStrike">
                 <a:latin typeface="Arial"/>
@@ -8429,7 +8009,7 @@
         <p:spPr>
           <a:xfrm>
             <a:off x="4238640" y="831240"/>
-            <a:ext cx="899640" cy="899640"/>
+            <a:ext cx="899280" cy="899280"/>
           </a:xfrm>
           <a:prstGeom prst="ellipse">
             <a:avLst/>
@@ -8470,6 +8050,7 @@
                   <a:srgbClr val="142111"/>
                 </a:solidFill>
                 <a:latin typeface="Calibri"/>
+                <a:ea typeface="DejaVu Sans"/>
               </a:rPr>
               <a:t>01</a:t>
             </a:r>
@@ -8488,7 +8069,7 @@
         <p:spPr>
           <a:xfrm>
             <a:off x="4238640" y="2243880"/>
-            <a:ext cx="899640" cy="887760"/>
+            <a:ext cx="899280" cy="887400"/>
           </a:xfrm>
           <a:prstGeom prst="ellipse">
             <a:avLst/>
@@ -8529,6 +8110,7 @@
                   <a:srgbClr val="142111"/>
                 </a:solidFill>
                 <a:latin typeface="Calibri"/>
+                <a:ea typeface="DejaVu Sans"/>
               </a:rPr>
               <a:t>02</a:t>
             </a:r>
@@ -8547,7 +8129,7 @@
         <p:spPr>
           <a:xfrm>
             <a:off x="4238640" y="3667320"/>
-            <a:ext cx="899640" cy="899640"/>
+            <a:ext cx="899280" cy="899280"/>
           </a:xfrm>
           <a:prstGeom prst="ellipse">
             <a:avLst/>
@@ -8588,6 +8170,7 @@
                   <a:srgbClr val="142111"/>
                 </a:solidFill>
                 <a:latin typeface="Calibri"/>
+                <a:ea typeface="DejaVu Sans"/>
               </a:rPr>
               <a:t>03</a:t>
             </a:r>
@@ -8606,7 +8189,7 @@
         <p:spPr>
           <a:xfrm>
             <a:off x="5020200" y="797040"/>
-            <a:ext cx="3764880" cy="550800"/>
+            <a:ext cx="3764520" cy="550440"/>
           </a:xfrm>
           <a:prstGeom prst="rect">
             <a:avLst/>
@@ -8668,7 +8251,7 @@
         <p:spPr>
           <a:xfrm>
             <a:off x="5020200" y="1332720"/>
-            <a:ext cx="3764880" cy="789840"/>
+            <a:ext cx="3764520" cy="789480"/>
           </a:xfrm>
           <a:prstGeom prst="rect">
             <a:avLst/>
@@ -8730,7 +8313,7 @@
         <p:spPr>
           <a:xfrm>
             <a:off x="5016600" y="2155320"/>
-            <a:ext cx="3764880" cy="550800"/>
+            <a:ext cx="3764520" cy="550440"/>
           </a:xfrm>
           <a:prstGeom prst="rect">
             <a:avLst/>
@@ -8782,7 +8365,7 @@
         <p:spPr>
           <a:xfrm>
             <a:off x="5016600" y="2687760"/>
-            <a:ext cx="3764880" cy="843480"/>
+            <a:ext cx="3764520" cy="843120"/>
           </a:xfrm>
           <a:prstGeom prst="rect">
             <a:avLst/>
@@ -8844,7 +8427,7 @@
         <p:spPr>
           <a:xfrm>
             <a:off x="5016600" y="3584880"/>
-            <a:ext cx="3764880" cy="550800"/>
+            <a:ext cx="3764520" cy="550440"/>
           </a:xfrm>
           <a:prstGeom prst="rect">
             <a:avLst/>
@@ -8896,7 +8479,7 @@
         <p:spPr>
           <a:xfrm>
             <a:off x="5016600" y="4117320"/>
-            <a:ext cx="3764880" cy="794880"/>
+            <a:ext cx="3764520" cy="794520"/>
           </a:xfrm>
           <a:prstGeom prst="rect">
             <a:avLst/>
@@ -8958,7 +8541,7 @@
         <p:spPr>
           <a:xfrm>
             <a:off x="384840" y="987840"/>
-            <a:ext cx="3687840" cy="3497040"/>
+            <a:ext cx="3687480" cy="3496680"/>
           </a:xfrm>
           <a:prstGeom prst="roundRect">
             <a:avLst>
@@ -9022,7 +8605,7 @@
         <p:spPr>
           <a:xfrm>
             <a:off x="8519760" y="4831560"/>
-            <a:ext cx="484920" cy="226800"/>
+            <a:ext cx="484560" cy="226800"/>
           </a:xfrm>
           <a:prstGeom prst="rect">
             <a:avLst/>
@@ -9068,27 +8651,39 @@
       <p:sp>
         <p:nvSpPr>
           <p:cNvPr id="111" name=""/>
-          <p:cNvSpPr txBox="1"/>
+          <p:cNvSpPr/>
           <p:nvPr/>
         </p:nvSpPr>
         <p:spPr>
           <a:xfrm>
             <a:off x="300600" y="228600"/>
-            <a:ext cx="8614800" cy="685800"/>
-          </a:xfrm>
-          <a:prstGeom prst="rect">
-            <a:avLst/>
-          </a:prstGeom>
-          <a:noFill/>
-          <a:ln w="0">
-            <a:noFill/>
-          </a:ln>
-        </p:spPr>
+            <a:ext cx="8614440" cy="685440"/>
+          </a:xfrm>
+          <a:prstGeom prst="rect">
+            <a:avLst/>
+          </a:prstGeom>
+          <a:noFill/>
+          <a:ln w="0">
+            <a:noFill/>
+          </a:ln>
+        </p:spPr>
+        <p:style>
+          <a:lnRef idx="0"/>
+          <a:fillRef idx="0"/>
+          <a:effectRef idx="0"/>
+          <a:fontRef idx="minor"/>
+        </p:style>
         <p:txBody>
           <a:bodyPr lIns="90000" rIns="90000" tIns="45000" bIns="45000" anchor="t">
             <a:noAutofit/>
           </a:bodyPr>
           <a:p>
+            <a:pPr>
+              <a:lnSpc>
+                <a:spcPct val="100000"/>
+              </a:lnSpc>
+              <a:buNone/>
+            </a:pPr>
             <a:r>
               <a:rPr b="0" lang="en-US" sz="1800" spc="-1" strike="noStrike">
                 <a:latin typeface="Arial"/>
@@ -9140,7 +8735,7 @@
         <p:spPr>
           <a:xfrm>
             <a:off x="0" y="3075480"/>
-            <a:ext cx="9143640" cy="2495160"/>
+            <a:ext cx="9143280" cy="2494800"/>
           </a:xfrm>
           <a:prstGeom prst="roundRect">
             <a:avLst>
@@ -9204,7 +8799,7 @@
         <p:spPr>
           <a:xfrm>
             <a:off x="474840" y="841680"/>
-            <a:ext cx="2557080" cy="2055600"/>
+            <a:ext cx="2556720" cy="2055240"/>
           </a:xfrm>
           <a:prstGeom prst="roundRect">
             <a:avLst>
@@ -9244,7 +8839,7 @@
         <p:spPr>
           <a:xfrm>
             <a:off x="592920" y="973800"/>
-            <a:ext cx="2289960" cy="729360"/>
+            <a:ext cx="2289600" cy="729000"/>
           </a:xfrm>
           <a:prstGeom prst="rect">
             <a:avLst/>
@@ -9296,7 +8891,7 @@
         <p:spPr>
           <a:xfrm>
             <a:off x="592920" y="1757520"/>
-            <a:ext cx="2289960" cy="1162440"/>
+            <a:ext cx="2289600" cy="1162080"/>
           </a:xfrm>
           <a:prstGeom prst="rect">
             <a:avLst/>
@@ -9358,7 +8953,7 @@
         <p:spPr>
           <a:xfrm>
             <a:off x="3309120" y="841680"/>
-            <a:ext cx="2557080" cy="2055600"/>
+            <a:ext cx="2556720" cy="2055240"/>
           </a:xfrm>
           <a:prstGeom prst="roundRect">
             <a:avLst>
@@ -9398,7 +8993,7 @@
         <p:spPr>
           <a:xfrm>
             <a:off x="3426840" y="973800"/>
-            <a:ext cx="2289960" cy="729360"/>
+            <a:ext cx="2289600" cy="729000"/>
           </a:xfrm>
           <a:prstGeom prst="rect">
             <a:avLst/>
@@ -9450,7 +9045,7 @@
         <p:spPr>
           <a:xfrm>
             <a:off x="3426840" y="1757520"/>
-            <a:ext cx="2289960" cy="1162440"/>
+            <a:ext cx="2289600" cy="1162080"/>
           </a:xfrm>
           <a:prstGeom prst="rect">
             <a:avLst/>
@@ -9502,7 +9097,7 @@
         <p:spPr>
           <a:xfrm>
             <a:off x="6143040" y="841680"/>
-            <a:ext cx="2557080" cy="2055600"/>
+            <a:ext cx="2556720" cy="2055240"/>
           </a:xfrm>
           <a:prstGeom prst="roundRect">
             <a:avLst>
@@ -9542,7 +9137,7 @@
         <p:spPr>
           <a:xfrm>
             <a:off x="6260760" y="973800"/>
-            <a:ext cx="2289960" cy="729360"/>
+            <a:ext cx="2289600" cy="729000"/>
           </a:xfrm>
           <a:prstGeom prst="rect">
             <a:avLst/>
@@ -9594,7 +9189,7 @@
         <p:spPr>
           <a:xfrm>
             <a:off x="6260760" y="1757520"/>
-            <a:ext cx="2289960" cy="1162440"/>
+            <a:ext cx="2289600" cy="1162080"/>
           </a:xfrm>
           <a:prstGeom prst="rect">
             <a:avLst/>
@@ -9646,7 +9241,7 @@
         <p:spPr>
           <a:xfrm>
             <a:off x="8519760" y="4831560"/>
-            <a:ext cx="484920" cy="226800"/>
+            <a:ext cx="484560" cy="226800"/>
           </a:xfrm>
           <a:prstGeom prst="rect">
             <a:avLst/>
@@ -9692,27 +9287,39 @@
       <p:sp>
         <p:nvSpPr>
           <p:cNvPr id="123" name=""/>
-          <p:cNvSpPr txBox="1"/>
+          <p:cNvSpPr/>
           <p:nvPr/>
         </p:nvSpPr>
         <p:spPr>
           <a:xfrm>
             <a:off x="457200" y="349200"/>
-            <a:ext cx="8458200" cy="1022400"/>
-          </a:xfrm>
-          <a:prstGeom prst="rect">
-            <a:avLst/>
-          </a:prstGeom>
-          <a:noFill/>
-          <a:ln w="0">
-            <a:noFill/>
-          </a:ln>
-        </p:spPr>
+            <a:ext cx="8457840" cy="1022040"/>
+          </a:xfrm>
+          <a:prstGeom prst="rect">
+            <a:avLst/>
+          </a:prstGeom>
+          <a:noFill/>
+          <a:ln w="0">
+            <a:noFill/>
+          </a:ln>
+        </p:spPr>
+        <p:style>
+          <a:lnRef idx="0"/>
+          <a:fillRef idx="0"/>
+          <a:effectRef idx="0"/>
+          <a:fontRef idx="minor"/>
+        </p:style>
         <p:txBody>
           <a:bodyPr lIns="90000" rIns="90000" tIns="45000" bIns="45000" anchor="t">
             <a:noAutofit/>
           </a:bodyPr>
           <a:p>
+            <a:pPr>
+              <a:lnSpc>
+                <a:spcPct val="100000"/>
+              </a:lnSpc>
+              <a:buNone/>
+            </a:pPr>
             <a:r>
               <a:rPr b="0" lang="en-US" sz="1800" spc="-1" strike="noStrike">
                 <a:latin typeface="Arial"/>
@@ -9771,7 +9378,7 @@
         <p:spPr>
           <a:xfrm>
             <a:off x="5014080" y="250200"/>
-            <a:ext cx="3820680" cy="4625280"/>
+            <a:ext cx="3820320" cy="4624920"/>
           </a:xfrm>
           <a:prstGeom prst="roundRect">
             <a:avLst>
@@ -9818,6 +9425,7 @@
                   <a:srgbClr val="ffffff"/>
                 </a:solidFill>
                 <a:latin typeface="Calibri"/>
+                <a:ea typeface="DejaVu Sans"/>
               </a:rPr>
               <a:t>PIC</a:t>
             </a:r>
@@ -9836,7 +9444,7 @@
         <p:spPr>
           <a:xfrm>
             <a:off x="329400" y="250200"/>
-            <a:ext cx="4425120" cy="4625280"/>
+            <a:ext cx="4424760" cy="4624920"/>
           </a:xfrm>
           <a:prstGeom prst="roundRect">
             <a:avLst>
@@ -9874,7 +9482,7 @@
         <p:spPr>
           <a:xfrm>
             <a:off x="581760" y="828720"/>
-            <a:ext cx="3902040" cy="550800"/>
+            <a:ext cx="3901680" cy="550440"/>
           </a:xfrm>
           <a:prstGeom prst="rect">
             <a:avLst/>
@@ -9936,7 +9544,7 @@
         <p:spPr>
           <a:xfrm>
             <a:off x="581760" y="1364400"/>
-            <a:ext cx="3902040" cy="789840"/>
+            <a:ext cx="3901680" cy="789480"/>
           </a:xfrm>
           <a:prstGeom prst="rect">
             <a:avLst/>
@@ -9998,7 +9606,7 @@
         <p:spPr>
           <a:xfrm>
             <a:off x="578160" y="2154600"/>
-            <a:ext cx="3902040" cy="550800"/>
+            <a:ext cx="3901680" cy="550440"/>
           </a:xfrm>
           <a:prstGeom prst="rect">
             <a:avLst/>
@@ -10050,7 +9658,7 @@
         <p:spPr>
           <a:xfrm>
             <a:off x="578160" y="2687040"/>
-            <a:ext cx="3902040" cy="843480"/>
+            <a:ext cx="3901680" cy="843120"/>
           </a:xfrm>
           <a:prstGeom prst="rect">
             <a:avLst/>
@@ -10112,7 +9720,7 @@
         <p:spPr>
           <a:xfrm>
             <a:off x="578160" y="3482280"/>
-            <a:ext cx="3902040" cy="550800"/>
+            <a:ext cx="3901680" cy="550440"/>
           </a:xfrm>
           <a:prstGeom prst="rect">
             <a:avLst/>
@@ -10164,7 +9772,7 @@
         <p:spPr>
           <a:xfrm>
             <a:off x="578160" y="4015080"/>
-            <a:ext cx="3902040" cy="794880"/>
+            <a:ext cx="3901680" cy="794520"/>
           </a:xfrm>
           <a:prstGeom prst="rect">
             <a:avLst/>
@@ -10226,7 +9834,7 @@
         <p:spPr>
           <a:xfrm>
             <a:off x="8519760" y="4831560"/>
-            <a:ext cx="484920" cy="226800"/>
+            <a:ext cx="484560" cy="226800"/>
           </a:xfrm>
           <a:prstGeom prst="rect">
             <a:avLst/>
@@ -10272,27 +9880,39 @@
       <p:sp>
         <p:nvSpPr>
           <p:cNvPr id="133" name=""/>
-          <p:cNvSpPr txBox="1"/>
+          <p:cNvSpPr/>
           <p:nvPr/>
         </p:nvSpPr>
         <p:spPr>
           <a:xfrm>
             <a:off x="493200" y="300600"/>
-            <a:ext cx="4078800" cy="842400"/>
-          </a:xfrm>
-          <a:prstGeom prst="rect">
-            <a:avLst/>
-          </a:prstGeom>
-          <a:noFill/>
-          <a:ln w="0">
-            <a:noFill/>
-          </a:ln>
-        </p:spPr>
+            <a:ext cx="4078440" cy="842040"/>
+          </a:xfrm>
+          <a:prstGeom prst="rect">
+            <a:avLst/>
+          </a:prstGeom>
+          <a:noFill/>
+          <a:ln w="0">
+            <a:noFill/>
+          </a:ln>
+        </p:spPr>
+        <p:style>
+          <a:lnRef idx="0"/>
+          <a:fillRef idx="0"/>
+          <a:effectRef idx="0"/>
+          <a:fontRef idx="minor"/>
+        </p:style>
         <p:txBody>
           <a:bodyPr lIns="90000" rIns="90000" tIns="45000" bIns="45000" anchor="t">
             <a:noAutofit/>
           </a:bodyPr>
           <a:p>
+            <a:pPr>
+              <a:lnSpc>
+                <a:spcPct val="100000"/>
+              </a:lnSpc>
+              <a:buNone/>
+            </a:pPr>
             <a:r>
               <a:rPr b="0" lang="en-US" sz="1800" spc="-1" strike="noStrike">
                 <a:latin typeface="Arial"/>
@@ -10344,7 +9964,7 @@
         <p:spPr>
           <a:xfrm>
             <a:off x="479160" y="2886480"/>
-            <a:ext cx="365400" cy="360000"/>
+            <a:ext cx="365040" cy="359640"/>
           </a:xfrm>
           <a:prstGeom prst="roundRect">
             <a:avLst>
@@ -10374,7 +9994,7 @@
         <p:spPr>
           <a:xfrm>
             <a:off x="3440880" y="2886480"/>
-            <a:ext cx="365400" cy="360000"/>
+            <a:ext cx="365040" cy="359640"/>
           </a:xfrm>
           <a:prstGeom prst="roundRect">
             <a:avLst>
@@ -10404,7 +10024,7 @@
         <p:spPr>
           <a:xfrm>
             <a:off x="6402960" y="2886480"/>
-            <a:ext cx="365400" cy="360000"/>
+            <a:ext cx="365040" cy="359640"/>
           </a:xfrm>
           <a:prstGeom prst="roundRect">
             <a:avLst>
@@ -10434,7 +10054,7 @@
         <p:spPr>
           <a:xfrm>
             <a:off x="479160" y="2883600"/>
-            <a:ext cx="365400" cy="363960"/>
+            <a:ext cx="365040" cy="363960"/>
           </a:xfrm>
           <a:prstGeom prst="rect">
             <a:avLst/>
@@ -10486,7 +10106,7 @@
         <p:spPr>
           <a:xfrm>
             <a:off x="3440880" y="2883600"/>
-            <a:ext cx="365400" cy="363960"/>
+            <a:ext cx="365040" cy="363960"/>
           </a:xfrm>
           <a:prstGeom prst="rect">
             <a:avLst/>
@@ -10538,7 +10158,7 @@
         <p:spPr>
           <a:xfrm>
             <a:off x="6402960" y="2883600"/>
-            <a:ext cx="365400" cy="363960"/>
+            <a:ext cx="365040" cy="363960"/>
           </a:xfrm>
           <a:prstGeom prst="rect">
             <a:avLst/>
@@ -10590,7 +10210,7 @@
         <p:spPr>
           <a:xfrm>
             <a:off x="858960" y="2571840"/>
-            <a:ext cx="2355120" cy="713880"/>
+            <a:ext cx="2354760" cy="713520"/>
           </a:xfrm>
           <a:prstGeom prst="rect">
             <a:avLst/>
@@ -10652,7 +10272,7 @@
         <p:spPr>
           <a:xfrm>
             <a:off x="858960" y="3356280"/>
-            <a:ext cx="2355120" cy="1565280"/>
+            <a:ext cx="2354760" cy="1564920"/>
           </a:xfrm>
           <a:prstGeom prst="rect">
             <a:avLst/>
@@ -10714,7 +10334,7 @@
         <p:spPr>
           <a:xfrm>
             <a:off x="3821040" y="2571840"/>
-            <a:ext cx="2355120" cy="713880"/>
+            <a:ext cx="2354760" cy="713520"/>
           </a:xfrm>
           <a:prstGeom prst="rect">
             <a:avLst/>
@@ -10776,7 +10396,7 @@
         <p:spPr>
           <a:xfrm>
             <a:off x="3821040" y="3356280"/>
-            <a:ext cx="2355120" cy="1565280"/>
+            <a:ext cx="2354760" cy="1564920"/>
           </a:xfrm>
           <a:prstGeom prst="rect">
             <a:avLst/>
@@ -10838,7 +10458,7 @@
         <p:spPr>
           <a:xfrm>
             <a:off x="6782760" y="2571840"/>
-            <a:ext cx="2294280" cy="713880"/>
+            <a:ext cx="2293920" cy="713520"/>
           </a:xfrm>
           <a:prstGeom prst="rect">
             <a:avLst/>
@@ -10900,7 +10520,7 @@
         <p:spPr>
           <a:xfrm>
             <a:off x="6782760" y="3356280"/>
-            <a:ext cx="2294280" cy="1565280"/>
+            <a:ext cx="2293920" cy="1564920"/>
           </a:xfrm>
           <a:prstGeom prst="rect">
             <a:avLst/>
@@ -10962,7 +10582,7 @@
         <p:spPr>
           <a:xfrm>
             <a:off x="0" y="-478800"/>
-            <a:ext cx="9143640" cy="2328120"/>
+            <a:ext cx="9143280" cy="2327760"/>
           </a:xfrm>
           <a:prstGeom prst="roundRect">
             <a:avLst>
@@ -11026,7 +10646,7 @@
         <p:spPr>
           <a:xfrm>
             <a:off x="8519760" y="4831560"/>
-            <a:ext cx="484920" cy="226800"/>
+            <a:ext cx="484560" cy="226800"/>
           </a:xfrm>
           <a:prstGeom prst="rect">
             <a:avLst/>
@@ -11072,27 +10692,39 @@
       <p:sp>
         <p:nvSpPr>
           <p:cNvPr id="148" name=""/>
-          <p:cNvSpPr txBox="1"/>
+          <p:cNvSpPr/>
           <p:nvPr/>
         </p:nvSpPr>
         <p:spPr>
           <a:xfrm>
             <a:off x="228600" y="2057400"/>
-            <a:ext cx="8686800" cy="685800"/>
-          </a:xfrm>
-          <a:prstGeom prst="rect">
-            <a:avLst/>
-          </a:prstGeom>
-          <a:noFill/>
-          <a:ln w="0">
-            <a:noFill/>
-          </a:ln>
-        </p:spPr>
+            <a:ext cx="8686440" cy="685440"/>
+          </a:xfrm>
+          <a:prstGeom prst="rect">
+            <a:avLst/>
+          </a:prstGeom>
+          <a:noFill/>
+          <a:ln w="0">
+            <a:noFill/>
+          </a:ln>
+        </p:spPr>
+        <p:style>
+          <a:lnRef idx="0"/>
+          <a:fillRef idx="0"/>
+          <a:effectRef idx="0"/>
+          <a:fontRef idx="minor"/>
+        </p:style>
         <p:txBody>
           <a:bodyPr lIns="90000" rIns="90000" tIns="45000" bIns="45000" anchor="t">
             <a:noAutofit/>
           </a:bodyPr>
           <a:p>
+            <a:pPr>
+              <a:lnSpc>
+                <a:spcPct val="100000"/>
+              </a:lnSpc>
+              <a:buNone/>
+            </a:pPr>
             <a:r>
               <a:rPr b="0" lang="en-US" sz="1800" spc="-1" strike="noStrike">
                 <a:latin typeface="Arial"/>
